--- a/포트폴리오/서버_최재혁/포트폴리오.pptx
+++ b/포트폴리오/서버_최재혁/포트폴리오.pptx
@@ -36,15 +36,18 @@
     <p:sldId id="293" r:id="rId30"/>
     <p:sldId id="294" r:id="rId31"/>
     <p:sldId id="295" r:id="rId32"/>
-    <p:sldId id="262" r:id="rId33"/>
-    <p:sldId id="263" r:id="rId34"/>
-    <p:sldId id="264" r:id="rId35"/>
-    <p:sldId id="266" r:id="rId36"/>
-    <p:sldId id="267" r:id="rId37"/>
-    <p:sldId id="268" r:id="rId38"/>
-    <p:sldId id="269" r:id="rId39"/>
-    <p:sldId id="271" r:id="rId40"/>
-    <p:sldId id="272" r:id="rId41"/>
+    <p:sldId id="296" r:id="rId33"/>
+    <p:sldId id="297" r:id="rId34"/>
+    <p:sldId id="298" r:id="rId35"/>
+    <p:sldId id="262" r:id="rId36"/>
+    <p:sldId id="263" r:id="rId37"/>
+    <p:sldId id="264" r:id="rId38"/>
+    <p:sldId id="266" r:id="rId39"/>
+    <p:sldId id="267" r:id="rId40"/>
+    <p:sldId id="268" r:id="rId41"/>
+    <p:sldId id="269" r:id="rId42"/>
+    <p:sldId id="271" r:id="rId43"/>
+    <p:sldId id="272" r:id="rId44"/>
   </p:sldIdLst>
   <p:sldSz cx="10080625" cy="5670550"/>
   <p:notesSz cx="7559675" cy="10691813"/>
@@ -6717,11 +6720,14 @@
         </p:spPr>
         <p:txBody>
           <a:bodyPr>
-            <a:normAutofit/>
+            <a:normAutofit fontScale="92500" lnSpcReduction="10000"/>
           </a:bodyPr>
           <a:lstStyle/>
           <a:p>
             <a:pPr marL="0" indent="0">
+              <a:lnSpc>
+                <a:spcPct val="150000"/>
+              </a:lnSpc>
               <a:buNone/>
             </a:pPr>
             <a:r>
@@ -6747,6 +6753,9 @@
           </a:p>
           <a:p>
             <a:pPr>
+              <a:lnSpc>
+                <a:spcPct val="150000"/>
+              </a:lnSpc>
               <a:buFontTx/>
               <a:buChar char="-"/>
             </a:pPr>
@@ -6805,6 +6814,9 @@
           </a:p>
           <a:p>
             <a:pPr>
+              <a:lnSpc>
+                <a:spcPct val="150000"/>
+              </a:lnSpc>
               <a:buFontTx/>
               <a:buChar char="-"/>
             </a:pPr>
@@ -6851,6 +6863,9 @@
           </a:p>
           <a:p>
             <a:pPr marL="0" indent="0">
+              <a:lnSpc>
+                <a:spcPct val="150000"/>
+              </a:lnSpc>
               <a:buNone/>
             </a:pPr>
             <a:r>
@@ -9307,7 +9322,7 @@
         </p:spPr>
         <p:txBody>
           <a:bodyPr>
-            <a:normAutofit lnSpcReduction="10000"/>
+            <a:normAutofit/>
           </a:bodyPr>
           <a:lstStyle/>
           <a:p>
@@ -10221,425 +10236,461 @@
         </p:spPr>
         <p:txBody>
           <a:bodyPr>
-            <a:normAutofit lnSpcReduction="10000"/>
+            <a:normAutofit fontScale="77500" lnSpcReduction="20000"/>
           </a:bodyPr>
           <a:lstStyle/>
           <a:p>
             <a:pPr>
+              <a:lnSpc>
+                <a:spcPct val="150000"/>
+              </a:lnSpc>
               <a:buAutoNum type="arabicPeriod"/>
             </a:pPr>
             <a:r>
-              <a:rPr lang="ko-KR" altLang="en-US" sz="1200" dirty="0"/>
+              <a:rPr lang="ko-KR" altLang="en-US" sz="1400" dirty="0"/>
               <a:t>컨텐츠 부분에서 특정 패킷에 대응되는 이벤트들을 정의하고 </a:t>
             </a:r>
             <a:r>
-              <a:rPr lang="ko-KR" altLang="en-US" sz="1200" dirty="0" err="1"/>
+              <a:rPr lang="ko-KR" altLang="en-US" sz="1400" dirty="0" err="1"/>
               <a:t>함수포인터</a:t>
             </a:r>
             <a:r>
-              <a:rPr lang="ko-KR" altLang="en-US" sz="1200" dirty="0"/>
+              <a:rPr lang="ko-KR" altLang="en-US" sz="1400" dirty="0"/>
               <a:t> 배열에 </a:t>
             </a:r>
             <a:r>
-              <a:rPr lang="ko-KR" altLang="en-US" sz="1200" dirty="0" err="1"/>
+              <a:rPr lang="ko-KR" altLang="en-US" sz="1400" dirty="0" err="1"/>
               <a:t>함수포인터로서</a:t>
             </a:r>
             <a:r>
-              <a:rPr lang="ko-KR" altLang="en-US" sz="1200" dirty="0"/>
+              <a:rPr lang="ko-KR" altLang="en-US" sz="1400" dirty="0"/>
               <a:t> 등록한다</a:t>
             </a:r>
             <a:r>
-              <a:rPr lang="en-US" altLang="ko-KR" sz="1200" dirty="0"/>
+              <a:rPr lang="en-US" altLang="ko-KR" sz="1400" dirty="0"/>
               <a:t>. </a:t>
             </a:r>
           </a:p>
           <a:p>
             <a:pPr>
+              <a:lnSpc>
+                <a:spcPct val="150000"/>
+              </a:lnSpc>
               <a:buAutoNum type="arabicPeriod"/>
             </a:pPr>
             <a:r>
-              <a:rPr lang="ko-KR" altLang="en-US" sz="1200" dirty="0"/>
+              <a:rPr lang="ko-KR" altLang="en-US" sz="1400" dirty="0"/>
               <a:t>해당 </a:t>
             </a:r>
             <a:r>
-              <a:rPr lang="ko-KR" altLang="en-US" sz="1200" dirty="0" err="1"/>
+              <a:rPr lang="ko-KR" altLang="en-US" sz="1400" dirty="0" err="1"/>
               <a:t>함수포인터</a:t>
             </a:r>
             <a:r>
-              <a:rPr lang="ko-KR" altLang="en-US" sz="1200" dirty="0"/>
+              <a:rPr lang="ko-KR" altLang="en-US" sz="1400" dirty="0"/>
               <a:t> 배열의 시작주소를 </a:t>
             </a:r>
             <a:r>
-              <a:rPr lang="en-US" altLang="ko-KR" sz="1200" dirty="0"/>
+              <a:rPr lang="en-US" altLang="ko-KR" sz="1400" dirty="0"/>
               <a:t>Session</a:t>
             </a:r>
             <a:r>
-              <a:rPr lang="ko-KR" altLang="en-US" sz="1200" dirty="0"/>
+              <a:rPr lang="ko-KR" altLang="en-US" sz="1400" dirty="0"/>
               <a:t>의 </a:t>
             </a:r>
             <a:r>
-              <a:rPr lang="en-US" altLang="ko-KR" sz="1200" dirty="0"/>
+              <a:rPr lang="en-US" altLang="ko-KR" sz="1400" dirty="0"/>
               <a:t>static </a:t>
             </a:r>
             <a:r>
-              <a:rPr lang="ko-KR" altLang="en-US" sz="1200" dirty="0"/>
+              <a:rPr lang="ko-KR" altLang="en-US" sz="1400" dirty="0"/>
               <a:t>멤버변수로서 가지고 있게 한다</a:t>
             </a:r>
             <a:r>
-              <a:rPr lang="en-US" altLang="ko-KR" sz="1200" dirty="0"/>
+              <a:rPr lang="en-US" altLang="ko-KR" sz="1400" dirty="0"/>
               <a:t>.</a:t>
             </a:r>
           </a:p>
           <a:p>
             <a:pPr>
+              <a:lnSpc>
+                <a:spcPct val="270000"/>
+              </a:lnSpc>
               <a:buAutoNum type="arabicPeriod"/>
             </a:pPr>
             <a:r>
-              <a:rPr lang="ko-KR" altLang="en-US" sz="1200" dirty="0"/>
+              <a:rPr lang="ko-KR" altLang="en-US" sz="1400" dirty="0"/>
               <a:t>패킷은 해당 패킷을 핸들링 할 </a:t>
             </a:r>
             <a:r>
-              <a:rPr lang="ko-KR" altLang="en-US" sz="1200" dirty="0" err="1"/>
+              <a:rPr lang="ko-KR" altLang="en-US" sz="1400" dirty="0" err="1"/>
               <a:t>함수포인터</a:t>
             </a:r>
             <a:r>
-              <a:rPr lang="ko-KR" altLang="en-US" sz="1200" dirty="0"/>
+              <a:rPr lang="ko-KR" altLang="en-US" sz="1400" dirty="0"/>
               <a:t> 배열의 인덱스와 이 패킷의 크기정보로 구성된 </a:t>
             </a:r>
             <a:r>
-              <a:rPr lang="en-US" altLang="ko-KR" sz="1200" dirty="0" err="1"/>
+              <a:rPr lang="en-US" altLang="ko-KR" sz="1400" dirty="0" err="1"/>
               <a:t>PacketHeader</a:t>
             </a:r>
             <a:r>
-              <a:rPr lang="en-US" altLang="ko-KR" sz="1200" dirty="0"/>
+              <a:rPr lang="en-US" altLang="ko-KR" sz="1400" dirty="0"/>
               <a:t> </a:t>
             </a:r>
             <a:r>
-              <a:rPr lang="ko-KR" altLang="en-US" sz="1200" dirty="0"/>
+              <a:rPr lang="ko-KR" altLang="en-US" sz="1400" dirty="0"/>
               <a:t>구조체 그리고</a:t>
             </a:r>
             <a:r>
-              <a:rPr lang="en-US" altLang="ko-KR" sz="1200" dirty="0"/>
+              <a:rPr lang="en-US" altLang="ko-KR" sz="1400" dirty="0"/>
               <a:t> </a:t>
             </a:r>
             <a:r>
-              <a:rPr lang="en-US" altLang="ko-KR" sz="1200" dirty="0" err="1"/>
+              <a:rPr lang="en-US" altLang="ko-KR" sz="1400" dirty="0" err="1"/>
               <a:t>Flatbuffers</a:t>
             </a:r>
             <a:r>
-              <a:rPr lang="en-US" altLang="ko-KR" sz="1200" dirty="0"/>
+              <a:rPr lang="en-US" altLang="ko-KR" sz="1400" dirty="0"/>
               <a:t> </a:t>
             </a:r>
             <a:r>
-              <a:rPr lang="ko-KR" altLang="en-US" sz="1200" dirty="0"/>
+              <a:rPr lang="ko-KR" altLang="en-US" sz="1400" dirty="0"/>
               <a:t>라이브러리를 이용한 패킷의 본체로 구성하였다</a:t>
             </a:r>
             <a:r>
-              <a:rPr lang="en-US" altLang="ko-KR" sz="1200" dirty="0"/>
+              <a:rPr lang="en-US" altLang="ko-KR" sz="1400" dirty="0"/>
               <a:t>.</a:t>
             </a:r>
           </a:p>
           <a:p>
             <a:pPr>
+              <a:lnSpc>
+                <a:spcPct val="150000"/>
+              </a:lnSpc>
               <a:buAutoNum type="arabicPeriod"/>
             </a:pPr>
             <a:r>
-              <a:rPr lang="ko-KR" altLang="en-US" sz="1200" dirty="0"/>
+              <a:rPr lang="ko-KR" altLang="en-US" sz="1400" dirty="0"/>
               <a:t>패킷 하나를 만들고 보낼 때 마다 </a:t>
             </a:r>
             <a:r>
-              <a:rPr lang="en-US" altLang="ko-KR" sz="1200" dirty="0" err="1"/>
+              <a:rPr lang="en-US" altLang="ko-KR" sz="1400" dirty="0" err="1"/>
               <a:t>memcpy</a:t>
             </a:r>
             <a:r>
-              <a:rPr lang="ko-KR" altLang="en-US" sz="1200" dirty="0"/>
+              <a:rPr lang="ko-KR" altLang="en-US" sz="1400" dirty="0"/>
               <a:t>로 복사하는 오버헤드를 피하기 위해 하나의 패킷을 </a:t>
             </a:r>
             <a:r>
-              <a:rPr lang="en-US" altLang="ko-KR" sz="1200" dirty="0" err="1"/>
+              <a:rPr lang="en-US" altLang="ko-KR" sz="1400" dirty="0" err="1"/>
               <a:t>shared_ptr</a:t>
             </a:r>
             <a:r>
-              <a:rPr lang="ko-KR" altLang="en-US" sz="1200" dirty="0"/>
+              <a:rPr lang="ko-KR" altLang="en-US" sz="1400" dirty="0"/>
               <a:t>로 할당하고 이 포인터를 주고받는 방식을 선택하였다</a:t>
             </a:r>
             <a:r>
-              <a:rPr lang="en-US" altLang="ko-KR" sz="1200" dirty="0"/>
+              <a:rPr lang="en-US" altLang="ko-KR" sz="1400" dirty="0"/>
               <a:t>.</a:t>
             </a:r>
           </a:p>
           <a:p>
             <a:pPr>
+              <a:lnSpc>
+                <a:spcPct val="150000"/>
+              </a:lnSpc>
               <a:buAutoNum type="arabicPeriod"/>
             </a:pPr>
             <a:r>
-              <a:rPr lang="ko-KR" altLang="en-US" sz="1200" dirty="0"/>
+              <a:rPr lang="ko-KR" altLang="en-US" sz="1400" dirty="0"/>
               <a:t>이렇게 만들어진 패킷이 </a:t>
             </a:r>
             <a:r>
-              <a:rPr lang="en-US" altLang="ko-KR" sz="1200" dirty="0" err="1"/>
+              <a:rPr lang="en-US" altLang="ko-KR" sz="1400" dirty="0" err="1"/>
               <a:t>Recv</a:t>
             </a:r>
             <a:r>
-              <a:rPr lang="ko-KR" altLang="en-US" sz="1200" dirty="0"/>
+              <a:rPr lang="ko-KR" altLang="en-US" sz="1400" dirty="0"/>
               <a:t>에서 도착했을 경우 </a:t>
             </a:r>
             <a:r>
-              <a:rPr lang="en-US" altLang="ko-KR" sz="1200" dirty="0"/>
+              <a:rPr lang="en-US" altLang="ko-KR" sz="1400" dirty="0"/>
               <a:t>…</a:t>
             </a:r>
           </a:p>
           <a:p>
             <a:pPr marL="0" indent="0">
+              <a:lnSpc>
+                <a:spcPct val="150000"/>
+              </a:lnSpc>
               <a:buNone/>
             </a:pPr>
             <a:r>
-              <a:rPr lang="en-US" altLang="ko-KR" sz="1200" dirty="0"/>
+              <a:rPr lang="en-US" altLang="ko-KR" sz="1400" dirty="0"/>
               <a:t> 5 - 1. </a:t>
             </a:r>
             <a:r>
-              <a:rPr lang="ko-KR" altLang="en-US" sz="1200" dirty="0"/>
+              <a:rPr lang="ko-KR" altLang="en-US" sz="1400" dirty="0"/>
               <a:t>수신된 데이터의 크기가 적어도 </a:t>
             </a:r>
             <a:r>
-              <a:rPr lang="en-US" altLang="ko-KR" sz="1200" dirty="0" err="1"/>
+              <a:rPr lang="en-US" altLang="ko-KR" sz="1400" dirty="0" err="1"/>
               <a:t>PacketHeader</a:t>
             </a:r>
             <a:r>
-              <a:rPr lang="ko-KR" altLang="en-US" sz="1200" dirty="0"/>
+              <a:rPr lang="ko-KR" altLang="en-US" sz="1400" dirty="0"/>
               <a:t>를 파싱 할 수는 있는지를 확인한다</a:t>
             </a:r>
             <a:r>
-              <a:rPr lang="en-US" altLang="ko-KR" sz="1200" dirty="0"/>
+              <a:rPr lang="en-US" altLang="ko-KR" sz="1400" dirty="0"/>
               <a:t>.</a:t>
             </a:r>
           </a:p>
           <a:p>
             <a:pPr marL="0" indent="0">
+              <a:lnSpc>
+                <a:spcPct val="150000"/>
+              </a:lnSpc>
               <a:buNone/>
             </a:pPr>
             <a:r>
-              <a:rPr lang="en-US" altLang="ko-KR" sz="1200" dirty="0"/>
+              <a:rPr lang="en-US" altLang="ko-KR" sz="1400" dirty="0"/>
               <a:t> 5 - 2. </a:t>
             </a:r>
             <a:r>
-              <a:rPr lang="ko-KR" altLang="en-US" sz="1200" dirty="0"/>
+              <a:rPr lang="ko-KR" altLang="en-US" sz="1400" dirty="0"/>
               <a:t>수신된 데이터의 크기가 </a:t>
             </a:r>
             <a:r>
-              <a:rPr lang="en-US" altLang="ko-KR" sz="1200" dirty="0" err="1"/>
+              <a:rPr lang="en-US" altLang="ko-KR" sz="1400" dirty="0" err="1"/>
               <a:t>PacketHeader</a:t>
             </a:r>
             <a:r>
-              <a:rPr lang="ko-KR" altLang="en-US" sz="1200" dirty="0"/>
+              <a:rPr lang="ko-KR" altLang="en-US" sz="1400" dirty="0"/>
               <a:t>의 크기 이상이라면 데이터를 </a:t>
             </a:r>
             <a:r>
-              <a:rPr lang="ko-KR" altLang="en-US" sz="1200" dirty="0" err="1"/>
+              <a:rPr lang="ko-KR" altLang="en-US" sz="1400" dirty="0" err="1"/>
               <a:t>수신받은</a:t>
             </a:r>
             <a:r>
-              <a:rPr lang="ko-KR" altLang="en-US" sz="1200" dirty="0"/>
+              <a:rPr lang="ko-KR" altLang="en-US" sz="1400" dirty="0"/>
               <a:t> 버퍼의 시작주소를 </a:t>
             </a:r>
             <a:r>
-              <a:rPr lang="en-US" altLang="ko-KR" sz="1200" dirty="0" err="1"/>
+              <a:rPr lang="en-US" altLang="ko-KR" sz="1400" dirty="0" err="1"/>
               <a:t>PacketHeader</a:t>
             </a:r>
             <a:r>
-              <a:rPr lang="ko-KR" altLang="en-US" sz="1200" dirty="0"/>
+              <a:rPr lang="ko-KR" altLang="en-US" sz="1400" dirty="0"/>
               <a:t>로 재해석 한다</a:t>
             </a:r>
             <a:r>
-              <a:rPr lang="en-US" altLang="ko-KR" sz="1200" dirty="0"/>
+              <a:rPr lang="en-US" altLang="ko-KR" sz="1400" dirty="0"/>
               <a:t>.</a:t>
             </a:r>
           </a:p>
           <a:p>
             <a:pPr marL="0" indent="0">
+              <a:lnSpc>
+                <a:spcPct val="150000"/>
+              </a:lnSpc>
               <a:buNone/>
             </a:pPr>
             <a:r>
-              <a:rPr lang="en-US" altLang="ko-KR" sz="1200" dirty="0"/>
+              <a:rPr lang="en-US" altLang="ko-KR" sz="1400" dirty="0"/>
               <a:t> 5 - 3. </a:t>
             </a:r>
             <a:r>
-              <a:rPr lang="ko-KR" altLang="en-US" sz="1200" dirty="0"/>
+              <a:rPr lang="ko-KR" altLang="en-US" sz="1400" dirty="0"/>
               <a:t>수신된 데이터의 크기가 </a:t>
             </a:r>
             <a:r>
-              <a:rPr lang="en-US" altLang="ko-KR" sz="1200" dirty="0" err="1"/>
+              <a:rPr lang="en-US" altLang="ko-KR" sz="1400" dirty="0" err="1"/>
               <a:t>PacketHeader</a:t>
             </a:r>
             <a:r>
-              <a:rPr lang="ko-KR" altLang="en-US" sz="1200" dirty="0"/>
+              <a:rPr lang="ko-KR" altLang="en-US" sz="1400" dirty="0"/>
               <a:t>에 기입된 패킷의 실제 사이즈 이상인지 확인한다</a:t>
             </a:r>
             <a:r>
-              <a:rPr lang="en-US" altLang="ko-KR" sz="1200" dirty="0"/>
+              <a:rPr lang="en-US" altLang="ko-KR" sz="1400" dirty="0"/>
               <a:t>.</a:t>
             </a:r>
           </a:p>
           <a:p>
             <a:pPr marL="0" indent="0">
+              <a:lnSpc>
+                <a:spcPct val="150000"/>
+              </a:lnSpc>
               <a:buNone/>
             </a:pPr>
             <a:r>
-              <a:rPr lang="en-US" altLang="ko-KR" sz="1200" dirty="0"/>
+              <a:rPr lang="en-US" altLang="ko-KR" sz="1400" dirty="0"/>
               <a:t> 5 - 4.</a:t>
             </a:r>
             <a:r>
-              <a:rPr lang="ko-KR" altLang="en-US" sz="1200" dirty="0"/>
+              <a:rPr lang="ko-KR" altLang="en-US" sz="1400" dirty="0"/>
               <a:t> 수신된 데이터의 크기가 </a:t>
             </a:r>
             <a:r>
-              <a:rPr lang="en-US" altLang="ko-KR" sz="1200" dirty="0" err="1"/>
+              <a:rPr lang="en-US" altLang="ko-KR" sz="1400" dirty="0" err="1"/>
               <a:t>PacketHeader</a:t>
             </a:r>
             <a:r>
-              <a:rPr lang="ko-KR" altLang="en-US" sz="1200" dirty="0"/>
+              <a:rPr lang="ko-KR" altLang="en-US" sz="1400" dirty="0"/>
               <a:t>에 기입된 패킷의 실제 사이즈 이상이라면 </a:t>
             </a:r>
             <a:r>
-              <a:rPr lang="en-US" altLang="ko-KR" sz="1200" dirty="0" err="1"/>
+              <a:rPr lang="en-US" altLang="ko-KR" sz="1400" dirty="0" err="1"/>
               <a:t>PacketHeader</a:t>
             </a:r>
             <a:r>
-              <a:rPr lang="ko-KR" altLang="en-US" sz="1200" dirty="0"/>
+              <a:rPr lang="ko-KR" altLang="en-US" sz="1400" dirty="0"/>
               <a:t>에 기입된 </a:t>
             </a:r>
             <a:r>
-              <a:rPr lang="ko-KR" altLang="en-US" sz="1200" dirty="0" err="1"/>
+              <a:rPr lang="ko-KR" altLang="en-US" sz="1400" dirty="0" err="1"/>
               <a:t>함수포인터</a:t>
             </a:r>
             <a:r>
-              <a:rPr lang="ko-KR" altLang="en-US" sz="1200" dirty="0"/>
+              <a:rPr lang="ko-KR" altLang="en-US" sz="1400" dirty="0"/>
               <a:t> 배열의 인덱스를 참조하여 해당 </a:t>
             </a:r>
             <a:r>
-              <a:rPr lang="ko-KR" altLang="en-US" sz="1200" dirty="0" err="1"/>
+              <a:rPr lang="ko-KR" altLang="en-US" sz="1400" dirty="0" err="1"/>
               <a:t>함수포인터에</a:t>
             </a:r>
             <a:r>
-              <a:rPr lang="ko-KR" altLang="en-US" sz="1200" dirty="0"/>
+              <a:rPr lang="ko-KR" altLang="en-US" sz="1400" dirty="0"/>
               <a:t> 이 세션의 포인터와 패킷을 매개변수로 하여 호출한다</a:t>
             </a:r>
             <a:r>
-              <a:rPr lang="en-US" altLang="ko-KR" sz="1200" dirty="0"/>
+              <a:rPr lang="en-US" altLang="ko-KR" sz="1400" dirty="0"/>
               <a:t>.</a:t>
             </a:r>
           </a:p>
           <a:p>
             <a:pPr marL="0" indent="0">
+              <a:lnSpc>
+                <a:spcPct val="150000"/>
+              </a:lnSpc>
               <a:buNone/>
             </a:pPr>
             <a:r>
-              <a:rPr lang="en-US" altLang="ko-KR" sz="1200" dirty="0"/>
+              <a:rPr lang="en-US" altLang="ko-KR" sz="1400" dirty="0"/>
               <a:t> 5 - 5. </a:t>
             </a:r>
             <a:r>
-              <a:rPr lang="ko-KR" altLang="en-US" sz="1200" dirty="0"/>
+              <a:rPr lang="ko-KR" altLang="en-US" sz="1400" dirty="0"/>
               <a:t>등록된 </a:t>
             </a:r>
             <a:r>
-              <a:rPr lang="ko-KR" altLang="en-US" sz="1200" dirty="0" err="1"/>
+              <a:rPr lang="ko-KR" altLang="en-US" sz="1400" dirty="0" err="1"/>
               <a:t>함수포인터</a:t>
             </a:r>
             <a:r>
-              <a:rPr lang="ko-KR" altLang="en-US" sz="1200" dirty="0"/>
+              <a:rPr lang="ko-KR" altLang="en-US" sz="1400" dirty="0"/>
               <a:t> 내부에서 패킷에 유효하지 않은 값 </a:t>
             </a:r>
             <a:r>
-              <a:rPr lang="en-US" altLang="ko-KR" sz="1200" dirty="0"/>
+              <a:rPr lang="en-US" altLang="ko-KR" sz="1400" dirty="0"/>
               <a:t>(</a:t>
             </a:r>
             <a:r>
-              <a:rPr lang="ko-KR" altLang="en-US" sz="1200" dirty="0"/>
+              <a:rPr lang="ko-KR" altLang="en-US" sz="1400" dirty="0"/>
               <a:t>배열의 인덱스를 넘어가거나 갈 수 없는 지역의 좌표 등</a:t>
             </a:r>
             <a:r>
-              <a:rPr lang="en-US" altLang="ko-KR" sz="1200" dirty="0"/>
+              <a:rPr lang="en-US" altLang="ko-KR" sz="1400" dirty="0"/>
               <a:t>…)</a:t>
             </a:r>
             <a:r>
-              <a:rPr lang="ko-KR" altLang="en-US" sz="1200" dirty="0"/>
+              <a:rPr lang="ko-KR" altLang="en-US" sz="1400" dirty="0"/>
               <a:t>이 있다면 </a:t>
             </a:r>
             <a:r>
-              <a:rPr lang="en-US" altLang="ko-KR" sz="1200" dirty="0"/>
+              <a:rPr lang="en-US" altLang="ko-KR" sz="1400" dirty="0"/>
               <a:t>false </a:t>
             </a:r>
             <a:r>
-              <a:rPr lang="ko-KR" altLang="en-US" sz="1200" dirty="0"/>
+              <a:rPr lang="ko-KR" altLang="en-US" sz="1400" dirty="0"/>
               <a:t>값을 </a:t>
             </a:r>
             <a:r>
-              <a:rPr lang="ko-KR" altLang="en-US" sz="1200" dirty="0" err="1"/>
+              <a:rPr lang="ko-KR" altLang="en-US" sz="1400" dirty="0" err="1"/>
               <a:t>리턴하여</a:t>
             </a:r>
             <a:r>
-              <a:rPr lang="ko-KR" altLang="en-US" sz="1200" dirty="0"/>
+              <a:rPr lang="ko-KR" altLang="en-US" sz="1400" dirty="0"/>
               <a:t> 문제가 있음을 알린다</a:t>
             </a:r>
             <a:r>
-              <a:rPr lang="en-US" altLang="ko-KR" sz="1200" dirty="0"/>
+              <a:rPr lang="en-US" altLang="ko-KR" sz="1400" dirty="0"/>
               <a:t>. (</a:t>
             </a:r>
             <a:r>
-              <a:rPr lang="en-US" altLang="ko-KR" sz="1200" dirty="0" err="1"/>
+              <a:rPr lang="en-US" altLang="ko-KR" sz="1400" dirty="0" err="1"/>
               <a:t>PacketHeader</a:t>
             </a:r>
             <a:r>
-              <a:rPr lang="ko-KR" altLang="en-US" sz="1200" dirty="0"/>
+              <a:rPr lang="ko-KR" altLang="en-US" sz="1400" dirty="0"/>
               <a:t>에 기입된 패킷의 사이즈와 핸들링 할 패킷의 사이즈가 같은 지의 여부도 확인한다</a:t>
             </a:r>
             <a:r>
-              <a:rPr lang="en-US" altLang="ko-KR" sz="1200" dirty="0"/>
+              <a:rPr lang="en-US" altLang="ko-KR" sz="1400" dirty="0"/>
               <a:t>.)</a:t>
             </a:r>
           </a:p>
           <a:p>
             <a:pPr marL="0" indent="0">
+              <a:lnSpc>
+                <a:spcPct val="150000"/>
+              </a:lnSpc>
               <a:buNone/>
             </a:pPr>
             <a:r>
-              <a:rPr lang="en-US" altLang="ko-KR" sz="1200" dirty="0"/>
+              <a:rPr lang="en-US" altLang="ko-KR" sz="1400" dirty="0"/>
               <a:t>6. </a:t>
             </a:r>
             <a:r>
-              <a:rPr lang="ko-KR" altLang="en-US" sz="1200" dirty="0"/>
+              <a:rPr lang="ko-KR" altLang="en-US" sz="1400" dirty="0"/>
               <a:t>해당 패킷에 대한 이벤트를 처리 후 아직도 처리할 데이터가 남았다면 </a:t>
             </a:r>
             <a:r>
-              <a:rPr lang="en-US" altLang="ko-KR" sz="1200" dirty="0"/>
+              <a:rPr lang="en-US" altLang="ko-KR" sz="1400" dirty="0"/>
               <a:t>1</a:t>
             </a:r>
             <a:r>
-              <a:rPr lang="ko-KR" altLang="en-US" sz="1200" dirty="0"/>
+              <a:rPr lang="ko-KR" altLang="en-US" sz="1400" dirty="0"/>
               <a:t>로 돌아가 위의 과정을 반복한다</a:t>
             </a:r>
             <a:r>
-              <a:rPr lang="en-US" altLang="ko-KR" sz="1200" dirty="0"/>
+              <a:rPr lang="en-US" altLang="ko-KR" sz="1400" dirty="0"/>
               <a:t>.</a:t>
             </a:r>
           </a:p>
           <a:p>
             <a:pPr marL="0" indent="0">
+              <a:lnSpc>
+                <a:spcPct val="150000"/>
+              </a:lnSpc>
               <a:buNone/>
             </a:pPr>
             <a:r>
-              <a:rPr lang="en-US" altLang="ko-KR" sz="1200" dirty="0"/>
+              <a:rPr lang="en-US" altLang="ko-KR" sz="1400" dirty="0"/>
               <a:t>(</a:t>
             </a:r>
             <a:r>
-              <a:rPr lang="ko-KR" altLang="en-US" sz="1200" dirty="0"/>
+              <a:rPr lang="ko-KR" altLang="en-US" sz="1400" dirty="0"/>
               <a:t>위의 방식은 클라이언트의 네트워크 관련 로직에도 거의 동일하게 적용하였다</a:t>
             </a:r>
             <a:r>
-              <a:rPr lang="en-US" altLang="ko-KR" sz="1200" dirty="0"/>
+              <a:rPr lang="en-US" altLang="ko-KR" sz="1400" dirty="0"/>
               <a:t>.)</a:t>
             </a:r>
-            <a:endParaRPr lang="ko-KR" altLang="en-US" sz="1200" dirty="0"/>
+            <a:endParaRPr lang="ko-KR" altLang="en-US" sz="1400" dirty="0"/>
           </a:p>
         </p:txBody>
       </p:sp>
@@ -10735,31 +10786,6 @@
           </a:p>
         </p:txBody>
       </p:sp>
-      <p:sp>
-        <p:nvSpPr>
-          <p:cNvPr id="3" name="텍스트 개체 틀 2">
-            <a:extLst>
-              <a:ext uri="{FF2B5EF4-FFF2-40B4-BE49-F238E27FC236}">
-                <a16:creationId xmlns:a16="http://schemas.microsoft.com/office/drawing/2014/main" id="{1F574E25-2A25-B1EF-B9BD-5EC13FDB219D}"/>
-              </a:ext>
-            </a:extLst>
-          </p:cNvPr>
-          <p:cNvSpPr>
-            <a:spLocks noGrp="1"/>
-          </p:cNvSpPr>
-          <p:nvPr>
-            <p:ph type="body"/>
-          </p:nvPr>
-        </p:nvSpPr>
-        <p:spPr/>
-        <p:txBody>
-          <a:bodyPr/>
-          <a:lstStyle/>
-          <a:p>
-            <a:endParaRPr lang="ko-KR" altLang="en-US" dirty="0"/>
-          </a:p>
-        </p:txBody>
-      </p:sp>
       <p:pic>
         <p:nvPicPr>
           <p:cNvPr id="5" name="그림 4">
@@ -10993,7 +11019,7 @@
         </p:nvSpPr>
         <p:spPr>
           <a:xfrm>
-            <a:off x="287337" y="580823"/>
+            <a:off x="287337" y="785611"/>
             <a:ext cx="9505949" cy="2148776"/>
           </a:xfrm>
         </p:spPr>
@@ -11004,6 +11030,9 @@
           <a:lstStyle/>
           <a:p>
             <a:pPr>
+              <a:lnSpc>
+                <a:spcPct val="160000"/>
+              </a:lnSpc>
               <a:buFontTx/>
               <a:buChar char="-"/>
             </a:pPr>
@@ -11018,6 +11047,9 @@
           </a:p>
           <a:p>
             <a:pPr marL="342900" indent="-342900">
+              <a:lnSpc>
+                <a:spcPct val="160000"/>
+              </a:lnSpc>
               <a:buAutoNum type="arabicPeriod"/>
             </a:pPr>
             <a:r>
@@ -11031,6 +11063,9 @@
           </a:p>
           <a:p>
             <a:pPr>
+              <a:lnSpc>
+                <a:spcPct val="160000"/>
+              </a:lnSpc>
               <a:buFontTx/>
               <a:buChar char="-"/>
             </a:pPr>
@@ -11082,6 +11117,9 @@
           </a:p>
           <a:p>
             <a:pPr>
+              <a:lnSpc>
+                <a:spcPct val="160000"/>
+              </a:lnSpc>
               <a:buFontTx/>
               <a:buChar char="-"/>
             </a:pPr>
@@ -11120,6 +11158,9 @@
           </a:p>
           <a:p>
             <a:pPr>
+              <a:lnSpc>
+                <a:spcPct val="160000"/>
+              </a:lnSpc>
               <a:buFontTx/>
               <a:buChar char="-"/>
             </a:pPr>
@@ -11162,6 +11203,9 @@
           </a:p>
           <a:p>
             <a:pPr>
+              <a:lnSpc>
+                <a:spcPct val="160000"/>
+              </a:lnSpc>
               <a:buFontTx/>
               <a:buChar char="-"/>
             </a:pPr>
@@ -11188,6 +11232,9 @@
           </a:p>
           <a:p>
             <a:pPr>
+              <a:lnSpc>
+                <a:spcPct val="160000"/>
+              </a:lnSpc>
               <a:buFontTx/>
               <a:buChar char="-"/>
             </a:pPr>
@@ -11210,6 +11257,9 @@
           </a:p>
           <a:p>
             <a:pPr>
+              <a:lnSpc>
+                <a:spcPct val="160000"/>
+              </a:lnSpc>
               <a:buFontTx/>
               <a:buChar char="-"/>
             </a:pPr>
@@ -11272,6 +11322,9 @@
           </a:p>
           <a:p>
             <a:pPr>
+              <a:lnSpc>
+                <a:spcPct val="160000"/>
+              </a:lnSpc>
               <a:buFontTx/>
               <a:buChar char="-"/>
             </a:pPr>
@@ -11318,6 +11371,9 @@
           </a:p>
           <a:p>
             <a:pPr>
+              <a:lnSpc>
+                <a:spcPct val="160000"/>
+              </a:lnSpc>
               <a:buFontTx/>
               <a:buChar char="-"/>
             </a:pPr>
@@ -11396,8 +11452,8 @@
         </p:nvSpPr>
         <p:spPr>
           <a:xfrm>
-            <a:off x="6256335" y="2729599"/>
-            <a:ext cx="3743324" cy="2308324"/>
+            <a:off x="6256335" y="2786749"/>
+            <a:ext cx="3743324" cy="2585323"/>
           </a:xfrm>
           <a:prstGeom prst="rect">
             <a:avLst/>
@@ -11411,12 +11467,12 @@
           <a:lstStyle/>
           <a:p>
             <a:r>
-              <a:rPr lang="en-US" altLang="ko-KR" dirty="0"/>
-              <a:t>IOCP</a:t>
+              <a:rPr lang="ko-KR" altLang="en-US" dirty="0" err="1"/>
+              <a:t>오버랩드</a:t>
             </a:r>
             <a:r>
               <a:rPr lang="ko-KR" altLang="en-US" dirty="0"/>
-              <a:t>의 </a:t>
+              <a:t> 구조체를 넘긴 </a:t>
             </a:r>
             <a:r>
               <a:rPr lang="en-US" altLang="ko-KR" dirty="0"/>
@@ -12522,17 +12578,20 @@
         </p:nvSpPr>
         <p:spPr>
           <a:xfrm>
-            <a:off x="461138" y="807488"/>
+            <a:off x="461138" y="682074"/>
             <a:ext cx="9071640" cy="1368975"/>
           </a:xfrm>
         </p:spPr>
         <p:txBody>
           <a:bodyPr>
-            <a:normAutofit/>
+            <a:normAutofit fontScale="92500" lnSpcReduction="20000"/>
           </a:bodyPr>
           <a:lstStyle/>
           <a:p>
             <a:pPr marL="0" indent="0">
+              <a:lnSpc>
+                <a:spcPct val="150000"/>
+              </a:lnSpc>
               <a:buNone/>
             </a:pPr>
             <a:r>
@@ -12554,6 +12613,9 @@
           </a:p>
           <a:p>
             <a:pPr>
+              <a:lnSpc>
+                <a:spcPct val="150000"/>
+              </a:lnSpc>
               <a:buFontTx/>
               <a:buChar char="-"/>
             </a:pPr>
@@ -12632,6 +12694,9 @@
           </a:p>
           <a:p>
             <a:pPr>
+              <a:lnSpc>
+                <a:spcPct val="150000"/>
+              </a:lnSpc>
               <a:buFontTx/>
               <a:buChar char="-"/>
             </a:pPr>
@@ -13066,7 +13131,7 @@
         </p:nvSpPr>
         <p:spPr>
           <a:xfrm>
-            <a:off x="419100" y="2326505"/>
+            <a:off x="419100" y="3269480"/>
             <a:ext cx="9489915" cy="1450205"/>
           </a:xfrm>
           <a:prstGeom prst="rect">
@@ -13117,7 +13182,7 @@
           <a:p>
             <a:r>
               <a:rPr lang="en-US" altLang="ko-KR" sz="1200" dirty="0"/>
-              <a:t>- AWS</a:t>
+              <a:t>-   AWS</a:t>
             </a:r>
             <a:r>
               <a:rPr lang="ko-KR" altLang="en-US" sz="1200" dirty="0"/>
@@ -13126,10 +13191,10 @@
             <a:endParaRPr lang="en-US" altLang="ko-KR" sz="1200" dirty="0"/>
           </a:p>
           <a:p>
-            <a:r>
-              <a:rPr lang="en-US" altLang="ko-KR" sz="1200" dirty="0"/>
-              <a:t>- </a:t>
-            </a:r>
+            <a:pPr marL="171450" indent="-171450">
+              <a:buFontTx/>
+              <a:buChar char="-"/>
+            </a:pPr>
             <a:r>
               <a:rPr lang="ko-KR" altLang="en-US" sz="1200" dirty="0"/>
               <a:t>특히 이 값이 </a:t>
@@ -13145,13 +13210,26 @@
             <a:endParaRPr lang="en-US" altLang="ko-KR" sz="1200" dirty="0"/>
           </a:p>
           <a:p>
+            <a:pPr marL="171450" indent="-171450">
+              <a:buFontTx/>
+              <a:buChar char="-"/>
+            </a:pPr>
+            <a:r>
+              <a:rPr lang="ko-KR" altLang="en-US" sz="1200" dirty="0"/>
+              <a:t>실제 패킷보다 크건 작건 다음 패킷 처리 시 문제 발생 </a:t>
+            </a:r>
             <a:r>
               <a:rPr lang="en-US" altLang="ko-KR" sz="1200" dirty="0"/>
-              <a:t>-</a:t>
-            </a:r>
-          </a:p>
-          <a:p>
-            <a:endParaRPr lang="en-US" altLang="ko-KR" sz="1200" dirty="0"/>
+              <a:t>(</a:t>
+            </a:r>
+            <a:r>
+              <a:rPr lang="ko-KR" altLang="en-US" sz="1200" dirty="0"/>
+              <a:t>버퍼의 엉뚱한 주소를 가리키게 됨</a:t>
+            </a:r>
+            <a:r>
+              <a:rPr lang="en-US" altLang="ko-KR" sz="1200" dirty="0"/>
+              <a:t>)</a:t>
+            </a:r>
           </a:p>
           <a:p>
             <a:r>
@@ -13184,26 +13262,165 @@
             </a:r>
             <a:r>
               <a:rPr lang="ko-KR" altLang="en-US" sz="1200" dirty="0"/>
-              <a:t> 크기와 실제 패킷의 크기가 정말 </a:t>
-            </a:r>
-            <a:r>
-              <a:rPr lang="ko-KR" altLang="en-US" sz="1200" dirty="0" err="1"/>
-              <a:t>같은지</a:t>
-            </a:r>
+              <a:t> 크기와 실제 패킷의 크기가 정말 같은 지 먼저 검증하도록 한다</a:t>
+            </a:r>
+            <a:r>
+              <a:rPr lang="en-US" altLang="ko-KR" sz="1200" dirty="0"/>
+              <a:t>.</a:t>
+            </a:r>
+          </a:p>
+          <a:p>
+            <a:endParaRPr lang="en-US" altLang="ko-KR" sz="1200" dirty="0"/>
+          </a:p>
+          <a:p>
+            <a:endParaRPr lang="ko-KR" altLang="en-US" sz="1200" dirty="0"/>
+          </a:p>
+        </p:txBody>
+      </p:sp>
+      <p:pic>
+        <p:nvPicPr>
+          <p:cNvPr id="8" name="그림 7">
+            <a:extLst>
+              <a:ext uri="{FF2B5EF4-FFF2-40B4-BE49-F238E27FC236}">
+                <a16:creationId xmlns:a16="http://schemas.microsoft.com/office/drawing/2014/main" id="{CD0FD656-6C9F-7044-DED6-BE00004CA5B8}"/>
+              </a:ext>
+            </a:extLst>
+          </p:cNvPr>
+          <p:cNvPicPr>
+            <a:picLocks noChangeAspect="1"/>
+          </p:cNvPicPr>
+          <p:nvPr/>
+        </p:nvPicPr>
+        <p:blipFill>
+          <a:blip r:embed="rId2">
+            <a:extLst>
+              <a:ext uri="{28A0092B-C50C-407E-A947-70E740481C1C}">
+                <a14:useLocalDpi xmlns:a14="http://schemas.microsoft.com/office/drawing/2010/main" val="0"/>
+              </a:ext>
+            </a:extLst>
+          </a:blip>
+          <a:stretch>
+            <a:fillRect/>
+          </a:stretch>
+        </p:blipFill>
+        <p:spPr>
+          <a:xfrm>
+            <a:off x="419100" y="2439987"/>
+            <a:ext cx="2990850" cy="790575"/>
+          </a:xfrm>
+          <a:prstGeom prst="rect">
+            <a:avLst/>
+          </a:prstGeom>
+        </p:spPr>
+      </p:pic>
+      <p:pic>
+        <p:nvPicPr>
+          <p:cNvPr id="6" name="그림 5">
+            <a:extLst>
+              <a:ext uri="{FF2B5EF4-FFF2-40B4-BE49-F238E27FC236}">
+                <a16:creationId xmlns:a16="http://schemas.microsoft.com/office/drawing/2014/main" id="{8BA15746-097D-A29F-7D14-02DF6DF7D61F}"/>
+              </a:ext>
+            </a:extLst>
+          </p:cNvPr>
+          <p:cNvPicPr>
+            <a:picLocks noChangeAspect="1"/>
+          </p:cNvPicPr>
+          <p:nvPr/>
+        </p:nvPicPr>
+        <p:blipFill>
+          <a:blip r:embed="rId3">
+            <a:extLst>
+              <a:ext uri="{28A0092B-C50C-407E-A947-70E740481C1C}">
+                <a14:useLocalDpi xmlns:a14="http://schemas.microsoft.com/office/drawing/2010/main" val="0"/>
+              </a:ext>
+            </a:extLst>
+          </a:blip>
+          <a:stretch>
+            <a:fillRect/>
+          </a:stretch>
+        </p:blipFill>
+        <p:spPr>
+          <a:xfrm>
+            <a:off x="419100" y="1843089"/>
+            <a:ext cx="7943850" cy="685800"/>
+          </a:xfrm>
+          <a:prstGeom prst="rect">
+            <a:avLst/>
+          </a:prstGeom>
+        </p:spPr>
+      </p:pic>
+      <p:pic>
+        <p:nvPicPr>
+          <p:cNvPr id="10" name="그림 9">
+            <a:extLst>
+              <a:ext uri="{FF2B5EF4-FFF2-40B4-BE49-F238E27FC236}">
+                <a16:creationId xmlns:a16="http://schemas.microsoft.com/office/drawing/2014/main" id="{5A230A09-65C9-1C4D-E997-172A88B8677B}"/>
+              </a:ext>
+            </a:extLst>
+          </p:cNvPr>
+          <p:cNvPicPr>
+            <a:picLocks noChangeAspect="1"/>
+          </p:cNvPicPr>
+          <p:nvPr/>
+        </p:nvPicPr>
+        <p:blipFill>
+          <a:blip r:embed="rId4">
+            <a:extLst>
+              <a:ext uri="{28A0092B-C50C-407E-A947-70E740481C1C}">
+                <a14:useLocalDpi xmlns:a14="http://schemas.microsoft.com/office/drawing/2010/main" val="0"/>
+              </a:ext>
+            </a:extLst>
+          </a:blip>
+          <a:stretch>
+            <a:fillRect/>
+          </a:stretch>
+        </p:blipFill>
+        <p:spPr>
+          <a:xfrm>
+            <a:off x="63502" y="4245886"/>
+            <a:ext cx="7642223" cy="1219200"/>
+          </a:xfrm>
+          <a:prstGeom prst="rect">
+            <a:avLst/>
+          </a:prstGeom>
+        </p:spPr>
+      </p:pic>
+      <p:sp>
+        <p:nvSpPr>
+          <p:cNvPr id="11" name="TextBox 10">
+            <a:extLst>
+              <a:ext uri="{FF2B5EF4-FFF2-40B4-BE49-F238E27FC236}">
+                <a16:creationId xmlns:a16="http://schemas.microsoft.com/office/drawing/2014/main" id="{C57C6AF0-2C72-2D83-2A88-02E149C34654}"/>
+              </a:ext>
+            </a:extLst>
+          </p:cNvPr>
+          <p:cNvSpPr txBox="1"/>
+          <p:nvPr/>
+        </p:nvSpPr>
+        <p:spPr>
+          <a:xfrm>
+            <a:off x="7705725" y="4813945"/>
+            <a:ext cx="1750852" cy="646331"/>
+          </a:xfrm>
+          <a:prstGeom prst="rect">
+            <a:avLst/>
+          </a:prstGeom>
+          <a:noFill/>
+        </p:spPr>
+        <p:txBody>
+          <a:bodyPr wrap="square" rtlCol="0">
+            <a:spAutoFit/>
+          </a:bodyPr>
+          <a:lstStyle/>
+          <a:p>
             <a:r>
               <a:rPr lang="ko-KR" altLang="en-US" sz="1200" dirty="0"/>
-              <a:t> 먼저 검증하도록 한다</a:t>
-            </a:r>
-            <a:r>
-              <a:rPr lang="en-US" altLang="ko-KR" sz="1200"/>
+              <a:t>라이브러리에서 지원하는 패킷 유효성 검사 함수를 사용하였다</a:t>
+            </a:r>
+            <a:r>
+              <a:rPr lang="en-US" altLang="ko-KR" sz="1200" dirty="0"/>
               <a:t>.</a:t>
             </a:r>
-            <a:endParaRPr lang="en-US" altLang="ko-KR" sz="1200" dirty="0"/>
-          </a:p>
-          <a:p>
-            <a:endParaRPr lang="en-US" altLang="ko-KR" sz="1200" dirty="0"/>
-          </a:p>
-          <a:p>
             <a:endParaRPr lang="ko-KR" altLang="en-US" sz="1200" dirty="0"/>
           </a:p>
         </p:txBody>
@@ -13243,7 +13460,7 @@
           <p:cNvPr id="2" name="제목 1">
             <a:extLst>
               <a:ext uri="{FF2B5EF4-FFF2-40B4-BE49-F238E27FC236}">
-                <a16:creationId xmlns:a16="http://schemas.microsoft.com/office/drawing/2014/main" id="{F31810A9-DA1E-D573-8727-39EC842F9481}"/>
+                <a16:creationId xmlns:a16="http://schemas.microsoft.com/office/drawing/2014/main" id="{8BD2DF09-823D-445A-532B-204DD6412CA9}"/>
               </a:ext>
             </a:extLst>
           </p:cNvPr>
@@ -13266,7 +13483,7 @@
           <a:p>
             <a:r>
               <a:rPr lang="en-US" altLang="ko-KR" dirty="0"/>
-              <a:t>4.2 </a:t>
+              <a:t>4.3 </a:t>
             </a:r>
             <a:r>
               <a:rPr lang="ko-KR" altLang="en-US" dirty="0"/>
@@ -13274,11 +13491,11 @@
             </a:r>
             <a:r>
               <a:rPr lang="en-US" altLang="ko-KR" dirty="0"/>
-              <a:t>- </a:t>
+              <a:t>– </a:t>
             </a:r>
             <a:r>
               <a:rPr lang="ko-KR" altLang="en-US" dirty="0"/>
-              <a:t>서버구조</a:t>
+              <a:t>성능을 위한 노력</a:t>
             </a:r>
           </a:p>
         </p:txBody>
@@ -13288,7 +13505,7 @@
           <p:cNvPr id="3" name="텍스트 개체 틀 2">
             <a:extLst>
               <a:ext uri="{FF2B5EF4-FFF2-40B4-BE49-F238E27FC236}">
-                <a16:creationId xmlns:a16="http://schemas.microsoft.com/office/drawing/2014/main" id="{7BF23ACD-7118-A754-05B8-194393123B1A}"/>
+                <a16:creationId xmlns:a16="http://schemas.microsoft.com/office/drawing/2014/main" id="{D90FC4EA-121E-9AF9-5FF5-5C0260DF7A00}"/>
               </a:ext>
             </a:extLst>
           </p:cNvPr>
@@ -13301,67 +13518,30 @@
         </p:nvSpPr>
         <p:spPr>
           <a:xfrm>
-            <a:off x="442087" y="2835275"/>
-            <a:ext cx="9071640" cy="946440"/>
+            <a:off x="504000" y="1188762"/>
+            <a:ext cx="9071640" cy="2683426"/>
           </a:xfrm>
         </p:spPr>
         <p:txBody>
           <a:bodyPr/>
           <a:lstStyle/>
           <a:p>
-            <a:r>
-              <a:rPr lang="en-US" altLang="ko-KR" dirty="0"/>
-              <a:t>Task</a:t>
-            </a:r>
-            <a:r>
-              <a:rPr lang="ko-KR" altLang="en-US" dirty="0"/>
-              <a:t> </a:t>
-            </a:r>
-            <a:r>
-              <a:rPr lang="en-US" altLang="ko-KR" dirty="0"/>
-              <a:t>+</a:t>
-            </a:r>
-            <a:r>
-              <a:rPr lang="ko-KR" altLang="en-US" dirty="0"/>
-              <a:t> </a:t>
-            </a:r>
-            <a:r>
-              <a:rPr lang="en-US" altLang="ko-KR" dirty="0"/>
-              <a:t>Lock</a:t>
-            </a:r>
-            <a:r>
-              <a:rPr lang="ko-KR" altLang="en-US" dirty="0"/>
-              <a:t> </a:t>
-            </a:r>
-            <a:r>
-              <a:rPr lang="en-US" altLang="ko-KR" dirty="0"/>
-              <a:t>Free</a:t>
-            </a:r>
-            <a:r>
-              <a:rPr lang="ko-KR" altLang="en-US" dirty="0"/>
-              <a:t> </a:t>
-            </a:r>
-            <a:r>
-              <a:rPr lang="en-US" altLang="ko-KR" dirty="0"/>
-              <a:t>Executor</a:t>
-            </a:r>
-          </a:p>
-          <a:p>
             <a:pPr marL="0" indent="0">
               <a:buNone/>
             </a:pPr>
             <a:r>
               <a:rPr lang="en-US" altLang="ko-KR" dirty="0"/>
-              <a:t>Task </a:t>
+              <a:t>1. Zero Byte</a:t>
             </a:r>
             <a:r>
               <a:rPr lang="ko-KR" altLang="en-US" dirty="0"/>
-              <a:t>코드 </a:t>
-            </a:r>
-            <a:r>
-              <a:rPr lang="en-US" altLang="ko-KR" dirty="0"/>
-              <a:t>+ </a:t>
-            </a:r>
+              <a:t> </a:t>
+            </a:r>
+            <a:r>
+              <a:rPr lang="en-US" altLang="ko-KR" dirty="0" err="1"/>
+              <a:t>Recv</a:t>
+            </a:r>
+            <a:endParaRPr lang="en-US" altLang="ko-KR" dirty="0"/>
           </a:p>
           <a:p>
             <a:pPr marL="0" indent="0">
@@ -13369,59 +13549,11 @@
             </a:pPr>
             <a:r>
               <a:rPr lang="en-US" altLang="ko-KR" dirty="0"/>
-              <a:t>Cluster Task </a:t>
+              <a:t>2. MPSC </a:t>
             </a:r>
             <a:r>
               <a:rPr lang="ko-KR" altLang="en-US" dirty="0"/>
-              <a:t>코드 </a:t>
-            </a:r>
-            <a:r>
-              <a:rPr lang="en-US" altLang="ko-KR" dirty="0"/>
-              <a:t>(</a:t>
-            </a:r>
-            <a:r>
-              <a:rPr lang="ko-KR" altLang="en-US" dirty="0"/>
-              <a:t>레퍼런스 카운터</a:t>
-            </a:r>
-            <a:r>
-              <a:rPr lang="en-US" altLang="ko-KR" dirty="0"/>
-              <a:t> </a:t>
-            </a:r>
-            <a:r>
-              <a:rPr lang="ko-KR" altLang="en-US" dirty="0"/>
-              <a:t>언급 </a:t>
-            </a:r>
-            <a:r>
-              <a:rPr lang="en-US" altLang="ko-KR" dirty="0"/>
-              <a:t>+ </a:t>
-            </a:r>
-            <a:r>
-              <a:rPr lang="ko-KR" altLang="en-US" dirty="0" err="1"/>
-              <a:t>수제작</a:t>
-            </a:r>
-            <a:r>
-              <a:rPr lang="ko-KR" altLang="en-US" dirty="0"/>
-              <a:t> </a:t>
-            </a:r>
-            <a:r>
-              <a:rPr lang="ko-KR" altLang="en-US" dirty="0" err="1"/>
-              <a:t>쉐어드</a:t>
-            </a:r>
-            <a:r>
-              <a:rPr lang="ko-KR" altLang="en-US" dirty="0"/>
-              <a:t> 포인터 </a:t>
-            </a:r>
-            <a:r>
-              <a:rPr lang="en-US" altLang="ko-KR" dirty="0"/>
-              <a:t>shared from this </a:t>
-            </a:r>
-            <a:r>
-              <a:rPr lang="ko-KR" altLang="en-US" dirty="0"/>
-              <a:t>성능비교</a:t>
-            </a:r>
-            <a:r>
-              <a:rPr lang="en-US" altLang="ko-KR" dirty="0"/>
-              <a:t>)</a:t>
+              <a:t>큐 </a:t>
             </a:r>
           </a:p>
           <a:p>
@@ -13430,7 +13562,7 @@
             </a:pPr>
             <a:r>
               <a:rPr lang="en-US" altLang="ko-KR" dirty="0"/>
-              <a:t>vs std::function </a:t>
+              <a:t>3. Task vs std::function</a:t>
             </a:r>
           </a:p>
           <a:p>
@@ -13439,36 +13571,40 @@
             </a:pPr>
             <a:r>
               <a:rPr lang="en-US" altLang="ko-KR" dirty="0"/>
-              <a:t>Lock Free Executor</a:t>
+              <a:t>4. Cluster </a:t>
             </a:r>
             <a:r>
               <a:rPr lang="ko-KR" altLang="en-US" dirty="0"/>
-              <a:t>를 위한 </a:t>
-            </a:r>
-            <a:r>
-              <a:rPr lang="en-US" altLang="ko-KR" dirty="0"/>
-              <a:t>MPSC </a:t>
+              <a:t>공간분할 </a:t>
+            </a:r>
+            <a:r>
+              <a:rPr lang="en-US" altLang="ko-KR" dirty="0"/>
+              <a:t>(</a:t>
             </a:r>
             <a:r>
               <a:rPr lang="ko-KR" altLang="en-US" dirty="0"/>
-              <a:t>큐 </a:t>
-            </a:r>
-            <a:r>
-              <a:rPr lang="en-US" altLang="ko-KR" dirty="0"/>
-              <a:t>+ </a:t>
-            </a:r>
-            <a:r>
-              <a:rPr lang="ko-KR" altLang="en-US" dirty="0"/>
-              <a:t>그림</a:t>
-            </a:r>
-            <a:endParaRPr lang="en-US" altLang="ko-KR" dirty="0"/>
+              <a:t>테두리 언급</a:t>
+            </a:r>
+            <a:r>
+              <a:rPr lang="en-US" altLang="ko-KR" dirty="0"/>
+              <a:t>)</a:t>
+            </a:r>
+          </a:p>
+          <a:p>
+            <a:pPr marL="0" indent="0">
+              <a:buNone/>
+            </a:pPr>
+            <a:r>
+              <a:rPr lang="en-US" altLang="ko-KR" dirty="0"/>
+              <a:t>5. view list + vector hash</a:t>
+            </a:r>
           </a:p>
         </p:txBody>
       </p:sp>
     </p:spTree>
     <p:extLst>
       <p:ext uri="{BB962C8B-B14F-4D97-AF65-F5344CB8AC3E}">
-        <p14:creationId xmlns:p14="http://schemas.microsoft.com/office/powerpoint/2010/main" val="1250876929"/>
+        <p14:creationId xmlns:p14="http://schemas.microsoft.com/office/powerpoint/2010/main" val="1630174052"/>
       </p:ext>
     </p:extLst>
   </p:cSld>
@@ -13500,7 +13636,7 @@
           <p:cNvPr id="2" name="제목 1">
             <a:extLst>
               <a:ext uri="{FF2B5EF4-FFF2-40B4-BE49-F238E27FC236}">
-                <a16:creationId xmlns:a16="http://schemas.microsoft.com/office/drawing/2014/main" id="{FB588CE1-72C8-44B5-D11D-1B1B8CB1099F}"/>
+                <a16:creationId xmlns:a16="http://schemas.microsoft.com/office/drawing/2014/main" id="{7F0AAE4B-A298-113E-439A-3B1C927C4E60}"/>
               </a:ext>
             </a:extLst>
           </p:cNvPr>
@@ -13513,8 +13649,8 @@
         </p:nvSpPr>
         <p:spPr>
           <a:xfrm>
-            <a:off x="504000" y="394601"/>
-            <a:ext cx="9071640" cy="609398"/>
+            <a:off x="270638" y="203175"/>
+            <a:ext cx="9071640" cy="249299"/>
           </a:xfrm>
         </p:spPr>
         <p:txBody>
@@ -13522,20 +13658,20 @@
           <a:lstStyle/>
           <a:p>
             <a:r>
-              <a:rPr lang="en-US" altLang="ko-KR" dirty="0"/>
-              <a:t>4.2 </a:t>
-            </a:r>
-            <a:r>
-              <a:rPr lang="ko-KR" altLang="en-US" dirty="0"/>
+              <a:rPr lang="en-US" altLang="ko-KR" sz="1800" dirty="0"/>
+              <a:t>4.3 </a:t>
+            </a:r>
+            <a:r>
+              <a:rPr lang="ko-KR" altLang="en-US" sz="1800" dirty="0"/>
               <a:t>졸작 </a:t>
             </a:r>
             <a:r>
-              <a:rPr lang="en-US" altLang="ko-KR" dirty="0"/>
-              <a:t>- </a:t>
-            </a:r>
-            <a:r>
-              <a:rPr lang="ko-KR" altLang="en-US" dirty="0"/>
-              <a:t>서버구조</a:t>
+              <a:rPr lang="en-US" altLang="ko-KR" sz="1800" dirty="0"/>
+              <a:t>– </a:t>
+            </a:r>
+            <a:r>
+              <a:rPr lang="ko-KR" altLang="en-US" sz="1800" dirty="0"/>
+              <a:t>성능을 위한 노력</a:t>
             </a:r>
           </a:p>
         </p:txBody>
@@ -13545,7 +13681,7 @@
           <p:cNvPr id="3" name="텍스트 개체 틀 2">
             <a:extLst>
               <a:ext uri="{FF2B5EF4-FFF2-40B4-BE49-F238E27FC236}">
-                <a16:creationId xmlns:a16="http://schemas.microsoft.com/office/drawing/2014/main" id="{CC359804-61C2-971F-A101-C42FAA1D67D6}"/>
+                <a16:creationId xmlns:a16="http://schemas.microsoft.com/office/drawing/2014/main" id="{F89A9FA6-3407-CFB7-9B20-5DF17CAD84C5}"/>
               </a:ext>
             </a:extLst>
           </p:cNvPr>
@@ -13558,56 +13694,410 @@
         </p:nvSpPr>
         <p:spPr>
           <a:xfrm>
-            <a:off x="313500" y="1388130"/>
-            <a:ext cx="9071640" cy="946440"/>
+            <a:off x="175388" y="559837"/>
+            <a:ext cx="9071640" cy="2316713"/>
           </a:xfrm>
         </p:spPr>
         <p:txBody>
           <a:bodyPr/>
           <a:lstStyle/>
           <a:p>
-            <a:r>
-              <a:rPr lang="en-US" altLang="ko-KR" dirty="0"/>
-              <a:t>MPSC </a:t>
+            <a:pPr marL="514350" indent="-514350">
+              <a:buAutoNum type="arabicPeriod"/>
+            </a:pPr>
+            <a:r>
+              <a:rPr lang="en-US" altLang="ko-KR" dirty="0"/>
+              <a:t>Zero Byte</a:t>
             </a:r>
             <a:r>
               <a:rPr lang="ko-KR" altLang="en-US" dirty="0"/>
-              <a:t>큐 성능 비교 분석 </a:t>
-            </a:r>
-            <a:r>
-              <a:rPr lang="en-US" altLang="ko-KR" dirty="0"/>
-              <a:t>+ </a:t>
-            </a:r>
+              <a:t> </a:t>
+            </a:r>
+            <a:r>
+              <a:rPr lang="en-US" altLang="ko-KR" dirty="0" err="1"/>
+              <a:t>Recv</a:t>
+            </a:r>
+            <a:endParaRPr lang="en-US" altLang="ko-KR" dirty="0"/>
+          </a:p>
+          <a:p>
+            <a:pPr>
+              <a:buFontTx/>
+              <a:buChar char="-"/>
+            </a:pPr>
+            <a:r>
+              <a:rPr lang="ko-KR" altLang="en-US" sz="1200" dirty="0"/>
+              <a:t>나는 이걸 왜 하였는가</a:t>
+            </a:r>
+            <a:r>
+              <a:rPr lang="en-US" altLang="ko-KR" sz="1200" dirty="0"/>
+              <a:t>?:</a:t>
+            </a:r>
+          </a:p>
+          <a:p>
+            <a:pPr>
+              <a:buFontTx/>
+              <a:buChar char="-"/>
+            </a:pPr>
+            <a:r>
+              <a:rPr lang="ko-KR" altLang="en-US" sz="1200" dirty="0" err="1"/>
+              <a:t>오버랩드</a:t>
+            </a:r>
+            <a:r>
+              <a:rPr lang="ko-KR" altLang="en-US" sz="1200" dirty="0"/>
+              <a:t> 구조체를 넘긴 </a:t>
+            </a:r>
+            <a:r>
+              <a:rPr lang="en-US" altLang="ko-KR" sz="1200" dirty="0" err="1"/>
+              <a:t>WSARecv</a:t>
+            </a:r>
+            <a:r>
+              <a:rPr lang="ko-KR" altLang="en-US" sz="1200" dirty="0"/>
+              <a:t> 호출</a:t>
+            </a:r>
+            <a:r>
+              <a:rPr lang="en-US" altLang="ko-KR" sz="1200" dirty="0"/>
+              <a:t>(</a:t>
+            </a:r>
+            <a:r>
+              <a:rPr lang="ko-KR" altLang="en-US" sz="1200" dirty="0"/>
+              <a:t>비동기 작업 요청</a:t>
+            </a:r>
+            <a:r>
+              <a:rPr lang="en-US" altLang="ko-KR" sz="1200" dirty="0"/>
+              <a:t>)</a:t>
+            </a:r>
+            <a:r>
+              <a:rPr lang="ko-KR" altLang="en-US" sz="1200" dirty="0"/>
+              <a:t>시 </a:t>
+            </a:r>
+            <a:r>
+              <a:rPr lang="en-US" altLang="ko-KR" sz="1200" dirty="0"/>
+              <a:t>PAGE LOCKING</a:t>
+            </a:r>
+            <a:r>
+              <a:rPr lang="ko-KR" altLang="en-US" sz="1200" dirty="0"/>
+              <a:t>을 걸게 된다</a:t>
+            </a:r>
+            <a:r>
+              <a:rPr lang="en-US" altLang="ko-KR" sz="1200" dirty="0"/>
+              <a:t>.</a:t>
+            </a:r>
+          </a:p>
+          <a:p>
+            <a:pPr>
+              <a:buFontTx/>
+              <a:buChar char="-"/>
+            </a:pPr>
+            <a:r>
+              <a:rPr lang="en-US" altLang="ko-KR" sz="1200" dirty="0" err="1"/>
+              <a:t>WSARecv</a:t>
+            </a:r>
+            <a:r>
+              <a:rPr lang="en-US" altLang="ko-KR" sz="1200" dirty="0"/>
+              <a:t> </a:t>
+            </a:r>
+            <a:r>
+              <a:rPr lang="ko-KR" altLang="en-US" sz="1200" dirty="0"/>
+              <a:t>호출 시 버퍼 사이즈를 </a:t>
+            </a:r>
+            <a:r>
+              <a:rPr lang="en-US" altLang="ko-KR" sz="1200" dirty="0"/>
+              <a:t>0</a:t>
+            </a:r>
+            <a:r>
+              <a:rPr lang="ko-KR" altLang="en-US" sz="1200" dirty="0"/>
+              <a:t>으로 제공하면 </a:t>
+            </a:r>
+            <a:r>
+              <a:rPr lang="en-US" altLang="ko-KR" sz="1200" dirty="0"/>
+              <a:t>PAGE LOCKING</a:t>
+            </a:r>
+            <a:r>
+              <a:rPr lang="ko-KR" altLang="en-US" sz="1200" dirty="0"/>
+              <a:t>을 걸지 않게 된다</a:t>
+            </a:r>
+            <a:endParaRPr lang="en-US" altLang="ko-KR" sz="1200" dirty="0"/>
+          </a:p>
+          <a:p>
+            <a:pPr>
+              <a:buFontTx/>
+              <a:buChar char="-"/>
+            </a:pPr>
+            <a:r>
+              <a:rPr lang="en-US" altLang="ko-KR" sz="1200" dirty="0"/>
+              <a:t>0 </a:t>
+            </a:r>
+            <a:r>
+              <a:rPr lang="ko-KR" altLang="en-US" sz="1200" dirty="0"/>
+              <a:t>바이트의 </a:t>
+            </a:r>
+            <a:r>
+              <a:rPr lang="en-US" altLang="ko-KR" sz="1200" dirty="0" err="1"/>
+              <a:t>WSARecv</a:t>
+            </a:r>
+            <a:r>
+              <a:rPr lang="ko-KR" altLang="en-US" sz="1200" dirty="0"/>
+              <a:t>의 비동기 작업 완료 시 곧 바로 제대로 된 버퍼 크기를 제공하여 </a:t>
+            </a:r>
+            <a:r>
+              <a:rPr lang="en-US" altLang="ko-KR" sz="1200" dirty="0" err="1"/>
+              <a:t>WSARecv</a:t>
+            </a:r>
+            <a:r>
+              <a:rPr lang="ko-KR" altLang="en-US" sz="1200" dirty="0"/>
+              <a:t>를 이용하여 바로 데이터를 수신</a:t>
+            </a:r>
+            <a:endParaRPr lang="en-US" altLang="ko-KR" sz="1200" dirty="0"/>
+          </a:p>
+          <a:p>
+            <a:pPr>
+              <a:buFontTx/>
+              <a:buChar char="-"/>
+            </a:pPr>
+            <a:r>
+              <a:rPr lang="ko-KR" altLang="en-US" sz="1200" dirty="0"/>
+              <a:t>얻는 것</a:t>
+            </a:r>
+            <a:r>
+              <a:rPr lang="en-US" altLang="ko-KR" sz="1200" dirty="0"/>
+              <a:t>: </a:t>
+            </a:r>
+          </a:p>
+          <a:p>
+            <a:pPr marL="0" indent="0">
+              <a:buNone/>
+            </a:pPr>
+            <a:r>
+              <a:rPr lang="en-US" altLang="ko-KR" sz="1200" dirty="0"/>
+              <a:t>      </a:t>
+            </a:r>
+            <a:r>
+              <a:rPr lang="ko-KR" altLang="en-US" sz="1200" dirty="0"/>
+              <a:t>아직 </a:t>
+            </a:r>
+            <a:r>
+              <a:rPr lang="en-US" altLang="ko-KR" sz="1200" dirty="0" err="1"/>
+              <a:t>Recv</a:t>
+            </a:r>
+            <a:r>
+              <a:rPr lang="en-US" altLang="ko-KR" sz="1200" dirty="0"/>
+              <a:t> </a:t>
+            </a:r>
+            <a:r>
+              <a:rPr lang="ko-KR" altLang="en-US" sz="1200" dirty="0"/>
+              <a:t>받은 게 없는 세션에 대해서 </a:t>
+            </a:r>
+            <a:r>
+              <a:rPr lang="en-US" altLang="ko-KR" sz="1200" dirty="0"/>
+              <a:t>non – paged pool</a:t>
+            </a:r>
+            <a:r>
+              <a:rPr lang="ko-KR" altLang="en-US" sz="1200" dirty="0"/>
+              <a:t>의 낭비 및 </a:t>
+            </a:r>
+            <a:r>
+              <a:rPr lang="en-US" altLang="ko-KR" sz="1200" dirty="0"/>
+              <a:t>PAGE LOCKING</a:t>
+            </a:r>
+            <a:r>
+              <a:rPr lang="ko-KR" altLang="en-US" sz="1200" dirty="0"/>
+              <a:t>의 빈도 수를 줄일 수 있게 된다</a:t>
+            </a:r>
+            <a:r>
+              <a:rPr lang="en-US" altLang="ko-KR" sz="1200" dirty="0"/>
+              <a:t>.</a:t>
+            </a:r>
+          </a:p>
+          <a:p>
+            <a:pPr marL="0" indent="0">
+              <a:buNone/>
+            </a:pPr>
+            <a:endParaRPr lang="en-US" altLang="ko-KR" sz="1200" dirty="0"/>
+          </a:p>
+        </p:txBody>
+      </p:sp>
+      <p:pic>
+        <p:nvPicPr>
+          <p:cNvPr id="4" name="그림 3">
+            <a:extLst>
+              <a:ext uri="{FF2B5EF4-FFF2-40B4-BE49-F238E27FC236}">
+                <a16:creationId xmlns:a16="http://schemas.microsoft.com/office/drawing/2014/main" id="{31AB82DF-E959-CF74-7660-EA197A8D7704}"/>
+              </a:ext>
+            </a:extLst>
+          </p:cNvPr>
+          <p:cNvPicPr>
+            <a:picLocks noChangeAspect="1"/>
+          </p:cNvPicPr>
+          <p:nvPr/>
+        </p:nvPicPr>
+        <p:blipFill>
+          <a:blip r:embed="rId2">
+            <a:extLst>
+              <a:ext uri="{28A0092B-C50C-407E-A947-70E740481C1C}">
+                <a14:useLocalDpi xmlns:a14="http://schemas.microsoft.com/office/drawing/2010/main" val="0"/>
+              </a:ext>
+            </a:extLst>
+          </a:blip>
+          <a:srcRect/>
+          <a:stretch>
+            <a:fillRect/>
+          </a:stretch>
+        </p:blipFill>
+        <p:spPr bwMode="auto">
+          <a:xfrm>
+            <a:off x="139970" y="2919413"/>
+            <a:ext cx="3846243" cy="1096645"/>
+          </a:xfrm>
+          <a:prstGeom prst="rect">
+            <a:avLst/>
+          </a:prstGeom>
+          <a:noFill/>
+          <a:ln>
+            <a:noFill/>
+          </a:ln>
+        </p:spPr>
+      </p:pic>
+      <p:pic>
+        <p:nvPicPr>
+          <p:cNvPr id="5" name="그림 4">
+            <a:extLst>
+              <a:ext uri="{FF2B5EF4-FFF2-40B4-BE49-F238E27FC236}">
+                <a16:creationId xmlns:a16="http://schemas.microsoft.com/office/drawing/2014/main" id="{B15D4DFC-4475-1AD0-1665-034CDF2FE323}"/>
+              </a:ext>
+            </a:extLst>
+          </p:cNvPr>
+          <p:cNvPicPr>
+            <a:picLocks noChangeAspect="1"/>
+          </p:cNvPicPr>
+          <p:nvPr/>
+        </p:nvPicPr>
+        <p:blipFill>
+          <a:blip r:embed="rId3">
+            <a:extLst>
+              <a:ext uri="{28A0092B-C50C-407E-A947-70E740481C1C}">
+                <a14:useLocalDpi xmlns:a14="http://schemas.microsoft.com/office/drawing/2010/main" val="0"/>
+              </a:ext>
+            </a:extLst>
+          </a:blip>
+          <a:srcRect/>
+          <a:stretch>
+            <a:fillRect/>
+          </a:stretch>
+        </p:blipFill>
+        <p:spPr bwMode="auto">
+          <a:xfrm>
+            <a:off x="4911249" y="2876550"/>
+            <a:ext cx="4297679" cy="1067435"/>
+          </a:xfrm>
+          <a:prstGeom prst="rect">
+            <a:avLst/>
+          </a:prstGeom>
+          <a:noFill/>
+          <a:ln>
+            <a:noFill/>
+          </a:ln>
+        </p:spPr>
+      </p:pic>
+      <p:sp>
+        <p:nvSpPr>
+          <p:cNvPr id="6" name="TextBox 5">
+            <a:extLst>
+              <a:ext uri="{FF2B5EF4-FFF2-40B4-BE49-F238E27FC236}">
+                <a16:creationId xmlns:a16="http://schemas.microsoft.com/office/drawing/2014/main" id="{300A0FF1-0883-2E48-0217-AB24007278B6}"/>
+              </a:ext>
+            </a:extLst>
+          </p:cNvPr>
+          <p:cNvSpPr txBox="1"/>
+          <p:nvPr/>
+        </p:nvSpPr>
+        <p:spPr>
+          <a:xfrm>
+            <a:off x="4233863" y="3204607"/>
+            <a:ext cx="639286" cy="369332"/>
+          </a:xfrm>
+          <a:prstGeom prst="rect">
+            <a:avLst/>
+          </a:prstGeom>
+          <a:noFill/>
+        </p:spPr>
+        <p:txBody>
+          <a:bodyPr wrap="square" rtlCol="0">
+            <a:spAutoFit/>
+          </a:bodyPr>
+          <a:lstStyle/>
+          <a:p>
             <a:r>
               <a:rPr lang="ko-KR" altLang="en-US" dirty="0" err="1"/>
-              <a:t>동접측정</a:t>
-            </a:r>
-            <a:endParaRPr lang="en-US" altLang="ko-KR" dirty="0"/>
-          </a:p>
-          <a:p>
-            <a:r>
-              <a:rPr lang="en-US" altLang="ko-KR" dirty="0"/>
-              <a:t>+ Session </a:t>
+              <a:t>ㅡ</a:t>
+            </a:r>
+            <a:r>
+              <a:rPr lang="en-US" altLang="ko-KR" dirty="0"/>
+              <a:t>&gt;</a:t>
+            </a:r>
+            <a:endParaRPr lang="ko-KR" altLang="en-US" dirty="0"/>
+          </a:p>
+        </p:txBody>
+      </p:sp>
+      <p:sp>
+        <p:nvSpPr>
+          <p:cNvPr id="7" name="TextBox 6">
+            <a:extLst>
+              <a:ext uri="{FF2B5EF4-FFF2-40B4-BE49-F238E27FC236}">
+                <a16:creationId xmlns:a16="http://schemas.microsoft.com/office/drawing/2014/main" id="{29BD1932-29CC-447D-C9F0-9E53D349A5F4}"/>
+              </a:ext>
+            </a:extLst>
+          </p:cNvPr>
+          <p:cNvSpPr txBox="1"/>
+          <p:nvPr/>
+        </p:nvSpPr>
+        <p:spPr>
+          <a:xfrm>
+            <a:off x="858345" y="4272042"/>
+            <a:ext cx="7705725" cy="646331"/>
+          </a:xfrm>
+          <a:prstGeom prst="rect">
+            <a:avLst/>
+          </a:prstGeom>
+          <a:noFill/>
+        </p:spPr>
+        <p:txBody>
+          <a:bodyPr wrap="square" rtlCol="0">
+            <a:spAutoFit/>
+          </a:bodyPr>
+          <a:lstStyle/>
+          <a:p>
+            <a:r>
+              <a:rPr lang="ko-KR" altLang="en-US" dirty="0"/>
+              <a:t>비주얼 스튜디오의 </a:t>
+            </a:r>
+            <a:r>
+              <a:rPr lang="en-US" altLang="ko-KR" dirty="0"/>
+              <a:t>Concurrency Visualizer</a:t>
+            </a:r>
+            <a:r>
+              <a:rPr lang="ko-KR" altLang="en-US" dirty="0"/>
+              <a:t>를 이용해 프로파일링 한 결과 </a:t>
             </a:r>
             <a:r>
               <a:rPr lang="en-US" altLang="ko-KR" dirty="0" err="1"/>
-              <a:t>recv</a:t>
-            </a:r>
-            <a:r>
-              <a:rPr lang="en-US" altLang="ko-KR" dirty="0"/>
-              <a:t> / send </a:t>
+              <a:t>Recv</a:t>
             </a:r>
             <a:r>
               <a:rPr lang="ko-KR" altLang="en-US" dirty="0"/>
-              <a:t>구조</a:t>
-            </a:r>
+              <a:t>의 오버헤드가 크게 감소함을 확인 할 수 있었다</a:t>
+            </a:r>
+            <a:r>
+              <a:rPr lang="en-US" altLang="ko-KR" dirty="0"/>
+              <a:t>.</a:t>
+            </a:r>
+            <a:endParaRPr lang="ko-KR" altLang="en-US" dirty="0"/>
           </a:p>
         </p:txBody>
       </p:sp>
     </p:spTree>
     <p:extLst>
       <p:ext uri="{BB962C8B-B14F-4D97-AF65-F5344CB8AC3E}">
-        <p14:creationId xmlns:p14="http://schemas.microsoft.com/office/powerpoint/2010/main" val="1205077931"/>
+        <p14:creationId xmlns:p14="http://schemas.microsoft.com/office/powerpoint/2010/main" val="494962230"/>
       </p:ext>
     </p:extLst>
   </p:cSld>
@@ -13639,7 +14129,7 @@
           <p:cNvPr id="2" name="제목 1">
             <a:extLst>
               <a:ext uri="{FF2B5EF4-FFF2-40B4-BE49-F238E27FC236}">
-                <a16:creationId xmlns:a16="http://schemas.microsoft.com/office/drawing/2014/main" id="{E4203474-3E2E-50C7-15E1-B335EF40B864}"/>
+                <a16:creationId xmlns:a16="http://schemas.microsoft.com/office/drawing/2014/main" id="{C0C7DE0F-231A-5AF6-0AD2-90FA0C78976B}"/>
               </a:ext>
             </a:extLst>
           </p:cNvPr>
@@ -13652,8 +14142,8 @@
         </p:nvSpPr>
         <p:spPr>
           <a:xfrm>
-            <a:off x="504000" y="394601"/>
-            <a:ext cx="9071640" cy="609398"/>
+            <a:off x="437325" y="149475"/>
+            <a:ext cx="9071640" cy="166199"/>
           </a:xfrm>
         </p:spPr>
         <p:txBody>
@@ -13661,20 +14151,20 @@
           <a:lstStyle/>
           <a:p>
             <a:r>
-              <a:rPr lang="en-US" altLang="ko-KR" dirty="0"/>
-              <a:t>4.2 </a:t>
-            </a:r>
-            <a:r>
-              <a:rPr lang="ko-KR" altLang="en-US" dirty="0"/>
+              <a:rPr lang="en-US" altLang="ko-KR" sz="1200" dirty="0"/>
+              <a:t>4.3 </a:t>
+            </a:r>
+            <a:r>
+              <a:rPr lang="ko-KR" altLang="en-US" sz="1200" dirty="0"/>
               <a:t>졸작 </a:t>
             </a:r>
             <a:r>
-              <a:rPr lang="en-US" altLang="ko-KR" dirty="0"/>
-              <a:t>- </a:t>
-            </a:r>
-            <a:r>
-              <a:rPr lang="ko-KR" altLang="en-US" dirty="0"/>
-              <a:t>서버구조</a:t>
+              <a:rPr lang="en-US" altLang="ko-KR" sz="1200" dirty="0"/>
+              <a:t>– </a:t>
+            </a:r>
+            <a:r>
+              <a:rPr lang="ko-KR" altLang="en-US" sz="1200" dirty="0"/>
+              <a:t>성능을 위한 노력</a:t>
             </a:r>
           </a:p>
         </p:txBody>
@@ -13684,7 +14174,7 @@
           <p:cNvPr id="3" name="텍스트 개체 틀 2">
             <a:extLst>
               <a:ext uri="{FF2B5EF4-FFF2-40B4-BE49-F238E27FC236}">
-                <a16:creationId xmlns:a16="http://schemas.microsoft.com/office/drawing/2014/main" id="{29E0250D-2782-017E-8E50-B045401E77C0}"/>
+                <a16:creationId xmlns:a16="http://schemas.microsoft.com/office/drawing/2014/main" id="{681E4D14-0EA4-D06F-C072-632987AD5A72}"/>
               </a:ext>
             </a:extLst>
           </p:cNvPr>
@@ -13697,8 +14187,8 @@
         </p:nvSpPr>
         <p:spPr>
           <a:xfrm>
-            <a:off x="546863" y="1226205"/>
-            <a:ext cx="9071640" cy="946440"/>
+            <a:off x="437325" y="502687"/>
+            <a:ext cx="9071640" cy="3288240"/>
           </a:xfrm>
         </p:spPr>
         <p:txBody>
@@ -13708,43 +14198,134 @@
             <a:pPr marL="0" indent="0">
               <a:buNone/>
             </a:pPr>
+            <a:endParaRPr lang="ko-KR" altLang="en-US" dirty="0"/>
+          </a:p>
+        </p:txBody>
+      </p:sp>
+      <p:pic>
+        <p:nvPicPr>
+          <p:cNvPr id="7" name="그림 6">
+            <a:extLst>
+              <a:ext uri="{FF2B5EF4-FFF2-40B4-BE49-F238E27FC236}">
+                <a16:creationId xmlns:a16="http://schemas.microsoft.com/office/drawing/2014/main" id="{B0F31934-E162-D0D7-1738-8213124A55C7}"/>
+              </a:ext>
+            </a:extLst>
+          </p:cNvPr>
+          <p:cNvPicPr>
+            <a:picLocks noChangeAspect="1"/>
+          </p:cNvPicPr>
+          <p:nvPr/>
+        </p:nvPicPr>
+        <p:blipFill>
+          <a:blip r:embed="rId2">
+            <a:extLst>
+              <a:ext uri="{28A0092B-C50C-407E-A947-70E740481C1C}">
+                <a14:useLocalDpi xmlns:a14="http://schemas.microsoft.com/office/drawing/2010/main" val="0"/>
+              </a:ext>
+            </a:extLst>
+          </a:blip>
+          <a:stretch>
+            <a:fillRect/>
+          </a:stretch>
+        </p:blipFill>
+        <p:spPr>
+          <a:xfrm>
+            <a:off x="5149650" y="232574"/>
+            <a:ext cx="4807150" cy="4006051"/>
+          </a:xfrm>
+          <a:prstGeom prst="rect">
+            <a:avLst/>
+          </a:prstGeom>
+        </p:spPr>
+      </p:pic>
+      <p:pic>
+        <p:nvPicPr>
+          <p:cNvPr id="9" name="그림 8">
+            <a:extLst>
+              <a:ext uri="{FF2B5EF4-FFF2-40B4-BE49-F238E27FC236}">
+                <a16:creationId xmlns:a16="http://schemas.microsoft.com/office/drawing/2014/main" id="{E756FADC-D40B-12FD-1FE3-8E3B13FF9880}"/>
+              </a:ext>
+            </a:extLst>
+          </p:cNvPr>
+          <p:cNvPicPr>
+            <a:picLocks noChangeAspect="1"/>
+          </p:cNvPicPr>
+          <p:nvPr/>
+        </p:nvPicPr>
+        <p:blipFill>
+          <a:blip r:embed="rId3">
+            <a:extLst>
+              <a:ext uri="{28A0092B-C50C-407E-A947-70E740481C1C}">
+                <a14:useLocalDpi xmlns:a14="http://schemas.microsoft.com/office/drawing/2010/main" val="0"/>
+              </a:ext>
+            </a:extLst>
+          </a:blip>
+          <a:stretch>
+            <a:fillRect/>
+          </a:stretch>
+        </p:blipFill>
+        <p:spPr>
+          <a:xfrm>
+            <a:off x="123825" y="315674"/>
+            <a:ext cx="5010149" cy="4046776"/>
+          </a:xfrm>
+          <a:prstGeom prst="rect">
+            <a:avLst/>
+          </a:prstGeom>
+        </p:spPr>
+      </p:pic>
+      <p:sp>
+        <p:nvSpPr>
+          <p:cNvPr id="11" name="TextBox 10">
+            <a:extLst>
+              <a:ext uri="{FF2B5EF4-FFF2-40B4-BE49-F238E27FC236}">
+                <a16:creationId xmlns:a16="http://schemas.microsoft.com/office/drawing/2014/main" id="{D7032EFC-D38D-6116-A54E-E810D80E8DD8}"/>
+              </a:ext>
+            </a:extLst>
+          </p:cNvPr>
+          <p:cNvSpPr txBox="1"/>
+          <p:nvPr/>
+        </p:nvSpPr>
+        <p:spPr>
+          <a:xfrm>
+            <a:off x="823913" y="4604855"/>
+            <a:ext cx="7981950" cy="369332"/>
+          </a:xfrm>
+          <a:prstGeom prst="rect">
+            <a:avLst/>
+          </a:prstGeom>
+          <a:noFill/>
+        </p:spPr>
+        <p:txBody>
+          <a:bodyPr wrap="square" rtlCol="0">
+            <a:spAutoFit/>
+          </a:bodyPr>
+          <a:lstStyle/>
+          <a:p>
             <a:r>
               <a:rPr lang="ko-KR" altLang="en-US" dirty="0"/>
-              <a:t>클러스터 업데이트 큐를 이용한 그림</a:t>
-            </a:r>
-            <a:endParaRPr lang="en-US" altLang="ko-KR" dirty="0"/>
-          </a:p>
-          <a:p>
-            <a:pPr marL="0" indent="0">
-              <a:buNone/>
-            </a:pPr>
-            <a:r>
-              <a:rPr lang="en-US" altLang="ko-KR" dirty="0"/>
-              <a:t>+ </a:t>
-            </a:r>
-            <a:r>
-              <a:rPr lang="ko-KR" altLang="en-US" dirty="0" err="1"/>
-              <a:t>동접</a:t>
+              <a:t>평균 딜레이가 </a:t>
+            </a:r>
+            <a:r>
+              <a:rPr lang="en-US" altLang="ko-KR" dirty="0"/>
+              <a:t>490ms -&gt; 138ms </a:t>
             </a:r>
             <a:r>
               <a:rPr lang="ko-KR" altLang="en-US" dirty="0"/>
-              <a:t> </a:t>
-            </a:r>
-            <a:r>
-              <a:rPr lang="en-US" altLang="ko-KR" dirty="0"/>
-              <a:t>9</a:t>
-            </a:r>
-            <a:r>
-              <a:rPr lang="ko-KR" altLang="en-US" dirty="0"/>
-              <a:t>천 짤 제시</a:t>
-            </a:r>
+              <a:t>로 엄청난 성능 향상이 가능하였다</a:t>
+            </a:r>
+            <a:r>
+              <a:rPr lang="en-US" altLang="ko-KR" dirty="0"/>
+              <a:t>. </a:t>
+            </a:r>
+            <a:endParaRPr lang="ko-KR" altLang="en-US" dirty="0"/>
           </a:p>
         </p:txBody>
       </p:sp>
     </p:spTree>
     <p:extLst>
       <p:ext uri="{BB962C8B-B14F-4D97-AF65-F5344CB8AC3E}">
-        <p14:creationId xmlns:p14="http://schemas.microsoft.com/office/powerpoint/2010/main" val="3223149513"/>
+        <p14:creationId xmlns:p14="http://schemas.microsoft.com/office/powerpoint/2010/main" val="2647893101"/>
       </p:ext>
     </p:extLst>
   </p:cSld>
@@ -13776,7 +14357,7 @@
           <p:cNvPr id="2" name="제목 1">
             <a:extLst>
               <a:ext uri="{FF2B5EF4-FFF2-40B4-BE49-F238E27FC236}">
-                <a16:creationId xmlns:a16="http://schemas.microsoft.com/office/drawing/2014/main" id="{052EAB5F-5E66-C504-E872-6E530EDFF2CC}"/>
+                <a16:creationId xmlns:a16="http://schemas.microsoft.com/office/drawing/2014/main" id="{F31810A9-DA1E-D573-8727-39EC842F9481}"/>
               </a:ext>
             </a:extLst>
           </p:cNvPr>
@@ -13799,7 +14380,7 @@
           <a:p>
             <a:r>
               <a:rPr lang="en-US" altLang="ko-KR" dirty="0"/>
-              <a:t>4.3 </a:t>
+              <a:t>4.2 </a:t>
             </a:r>
             <a:r>
               <a:rPr lang="ko-KR" altLang="en-US" dirty="0"/>
@@ -13807,11 +14388,11 @@
             </a:r>
             <a:r>
               <a:rPr lang="en-US" altLang="ko-KR" dirty="0"/>
-              <a:t>– </a:t>
+              <a:t>- </a:t>
             </a:r>
             <a:r>
               <a:rPr lang="ko-KR" altLang="en-US" dirty="0"/>
-              <a:t>기술요소</a:t>
+              <a:t>서버구조</a:t>
             </a:r>
           </a:p>
         </p:txBody>
@@ -13821,7 +14402,7 @@
           <p:cNvPr id="3" name="텍스트 개체 틀 2">
             <a:extLst>
               <a:ext uri="{FF2B5EF4-FFF2-40B4-BE49-F238E27FC236}">
-                <a16:creationId xmlns:a16="http://schemas.microsoft.com/office/drawing/2014/main" id="{4E554613-DC40-892F-F3B8-5432B9A1742C}"/>
+                <a16:creationId xmlns:a16="http://schemas.microsoft.com/office/drawing/2014/main" id="{7BF23ACD-7118-A754-05B8-194393123B1A}"/>
               </a:ext>
             </a:extLst>
           </p:cNvPr>
@@ -13834,7 +14415,7 @@
         </p:nvSpPr>
         <p:spPr>
           <a:xfrm>
-            <a:off x="504000" y="1230968"/>
+            <a:off x="442087" y="2835275"/>
             <a:ext cx="9071640" cy="946440"/>
           </a:xfrm>
         </p:spPr>
@@ -13843,41 +14424,165 @@
           <a:lstStyle/>
           <a:p>
             <a:r>
-              <a:rPr lang="ko-KR" altLang="en-US" dirty="0" err="1"/>
-              <a:t>제로바이트</a:t>
-            </a:r>
-            <a:r>
-              <a:rPr lang="ko-KR" altLang="en-US" dirty="0"/>
-              <a:t> 리시브 </a:t>
-            </a:r>
-            <a:r>
-              <a:rPr lang="en-US" altLang="ko-KR" dirty="0"/>
-              <a:t>( vs before after , </a:t>
-            </a:r>
-            <a:r>
-              <a:rPr lang="ko-KR" altLang="en-US" dirty="0" err="1"/>
-              <a:t>콘커런시</a:t>
+              <a:rPr lang="en-US" altLang="ko-KR" dirty="0"/>
+              <a:t>Task</a:t>
             </a:r>
             <a:r>
               <a:rPr lang="ko-KR" altLang="en-US" dirty="0"/>
               <a:t> </a:t>
             </a:r>
             <a:r>
+              <a:rPr lang="en-US" altLang="ko-KR" dirty="0"/>
+              <a:t>+</a:t>
+            </a:r>
+            <a:r>
+              <a:rPr lang="ko-KR" altLang="en-US" dirty="0"/>
+              <a:t> </a:t>
+            </a:r>
+            <a:r>
+              <a:rPr lang="en-US" altLang="ko-KR" dirty="0"/>
+              <a:t>Lock</a:t>
+            </a:r>
+            <a:r>
+              <a:rPr lang="ko-KR" altLang="en-US" dirty="0"/>
+              <a:t> </a:t>
+            </a:r>
+            <a:r>
+              <a:rPr lang="en-US" altLang="ko-KR" dirty="0"/>
+              <a:t>Free</a:t>
+            </a:r>
+            <a:r>
+              <a:rPr lang="ko-KR" altLang="en-US" dirty="0"/>
+              <a:t> </a:t>
+            </a:r>
+            <a:r>
+              <a:rPr lang="en-US" altLang="ko-KR" dirty="0"/>
+              <a:t>Executor</a:t>
+            </a:r>
+          </a:p>
+          <a:p>
+            <a:pPr marL="0" indent="0">
+              <a:buNone/>
+            </a:pPr>
+            <a:r>
+              <a:rPr lang="en-US" altLang="ko-KR" dirty="0"/>
+              <a:t>Task </a:t>
+            </a:r>
+            <a:r>
+              <a:rPr lang="ko-KR" altLang="en-US" dirty="0"/>
+              <a:t>코드 </a:t>
+            </a:r>
+            <a:r>
+              <a:rPr lang="en-US" altLang="ko-KR" dirty="0"/>
+              <a:t>+ </a:t>
+            </a:r>
+          </a:p>
+          <a:p>
+            <a:pPr marL="0" indent="0">
+              <a:buNone/>
+            </a:pPr>
+            <a:r>
+              <a:rPr lang="en-US" altLang="ko-KR" dirty="0"/>
+              <a:t>Cluster Task </a:t>
+            </a:r>
+            <a:r>
+              <a:rPr lang="ko-KR" altLang="en-US" dirty="0"/>
+              <a:t>코드 </a:t>
+            </a:r>
+            <a:r>
+              <a:rPr lang="en-US" altLang="ko-KR" dirty="0"/>
+              <a:t>(</a:t>
+            </a:r>
+            <a:r>
+              <a:rPr lang="ko-KR" altLang="en-US" dirty="0"/>
+              <a:t>레퍼런스 카운터</a:t>
+            </a:r>
+            <a:r>
+              <a:rPr lang="en-US" altLang="ko-KR" dirty="0"/>
+              <a:t> </a:t>
+            </a:r>
+            <a:r>
+              <a:rPr lang="ko-KR" altLang="en-US" dirty="0"/>
+              <a:t>언급 </a:t>
+            </a:r>
+            <a:r>
+              <a:rPr lang="en-US" altLang="ko-KR" dirty="0"/>
+              <a:t>+ </a:t>
+            </a:r>
+            <a:r>
               <a:rPr lang="ko-KR" altLang="en-US" dirty="0" err="1"/>
-              <a:t>비주얼라이저</a:t>
+              <a:t>수제작</a:t>
+            </a:r>
+            <a:r>
+              <a:rPr lang="ko-KR" altLang="en-US" dirty="0"/>
+              <a:t> </a:t>
+            </a:r>
+            <a:r>
+              <a:rPr lang="ko-KR" altLang="en-US" dirty="0" err="1"/>
+              <a:t>쉐어드</a:t>
+            </a:r>
+            <a:r>
+              <a:rPr lang="ko-KR" altLang="en-US" dirty="0"/>
+              <a:t> 포인터 </a:t>
+            </a:r>
+            <a:r>
+              <a:rPr lang="en-US" altLang="ko-KR" dirty="0"/>
+              <a:t>shared from this </a:t>
+            </a:r>
+            <a:r>
+              <a:rPr lang="ko-KR" altLang="en-US" dirty="0"/>
+              <a:t>성능비교</a:t>
             </a:r>
             <a:r>
               <a:rPr lang="en-US" altLang="ko-KR" dirty="0"/>
               <a:t>)</a:t>
             </a:r>
-            <a:endParaRPr lang="ko-KR" altLang="en-US" dirty="0"/>
+          </a:p>
+          <a:p>
+            <a:pPr marL="0" indent="0">
+              <a:buNone/>
+            </a:pPr>
+            <a:r>
+              <a:rPr lang="en-US" altLang="ko-KR" dirty="0"/>
+              <a:t>vs std::function </a:t>
+            </a:r>
+          </a:p>
+          <a:p>
+            <a:pPr marL="0" indent="0">
+              <a:buNone/>
+            </a:pPr>
+            <a:r>
+              <a:rPr lang="en-US" altLang="ko-KR" dirty="0"/>
+              <a:t>Lock Free Executor</a:t>
+            </a:r>
+            <a:r>
+              <a:rPr lang="ko-KR" altLang="en-US" dirty="0"/>
+              <a:t>를 위한 </a:t>
+            </a:r>
+            <a:r>
+              <a:rPr lang="en-US" altLang="ko-KR" dirty="0"/>
+              <a:t>MPSC </a:t>
+            </a:r>
+            <a:r>
+              <a:rPr lang="ko-KR" altLang="en-US" dirty="0"/>
+              <a:t>큐 </a:t>
+            </a:r>
+            <a:r>
+              <a:rPr lang="en-US" altLang="ko-KR" dirty="0"/>
+              <a:t>+ </a:t>
+            </a:r>
+            <a:r>
+              <a:rPr lang="ko-KR" altLang="en-US" dirty="0"/>
+              <a:t>그림</a:t>
+            </a:r>
+            <a:endParaRPr lang="en-US" altLang="ko-KR" dirty="0"/>
           </a:p>
         </p:txBody>
       </p:sp>
     </p:spTree>
     <p:extLst>
       <p:ext uri="{BB962C8B-B14F-4D97-AF65-F5344CB8AC3E}">
-        <p14:creationId xmlns:p14="http://schemas.microsoft.com/office/powerpoint/2010/main" val="2950612311"/>
+        <p14:creationId xmlns:p14="http://schemas.microsoft.com/office/powerpoint/2010/main" val="1250876929"/>
       </p:ext>
     </p:extLst>
   </p:cSld>
@@ -13909,7 +14614,7 @@
           <p:cNvPr id="2" name="제목 1">
             <a:extLst>
               <a:ext uri="{FF2B5EF4-FFF2-40B4-BE49-F238E27FC236}">
-                <a16:creationId xmlns:a16="http://schemas.microsoft.com/office/drawing/2014/main" id="{27793B23-368E-1800-A97C-D417D26BD0B4}"/>
+                <a16:creationId xmlns:a16="http://schemas.microsoft.com/office/drawing/2014/main" id="{FB588CE1-72C8-44B5-D11D-1B1B8CB1099F}"/>
               </a:ext>
             </a:extLst>
           </p:cNvPr>
@@ -13932,7 +14637,7 @@
           <a:p>
             <a:r>
               <a:rPr lang="en-US" altLang="ko-KR" dirty="0"/>
-              <a:t>4.3 </a:t>
+              <a:t>4.2 </a:t>
             </a:r>
             <a:r>
               <a:rPr lang="ko-KR" altLang="en-US" dirty="0"/>
@@ -13940,11 +14645,11 @@
             </a:r>
             <a:r>
               <a:rPr lang="en-US" altLang="ko-KR" dirty="0"/>
-              <a:t>– </a:t>
+              <a:t>- </a:t>
             </a:r>
             <a:r>
               <a:rPr lang="ko-KR" altLang="en-US" dirty="0"/>
-              <a:t>기술요소</a:t>
+              <a:t>서버구조</a:t>
             </a:r>
           </a:p>
         </p:txBody>
@@ -13954,7 +14659,7 @@
           <p:cNvPr id="3" name="텍스트 개체 틀 2">
             <a:extLst>
               <a:ext uri="{FF2B5EF4-FFF2-40B4-BE49-F238E27FC236}">
-                <a16:creationId xmlns:a16="http://schemas.microsoft.com/office/drawing/2014/main" id="{55DAF0E3-6C85-1D58-326C-7D817B657B1A}"/>
+                <a16:creationId xmlns:a16="http://schemas.microsoft.com/office/drawing/2014/main" id="{CC359804-61C2-971F-A101-C42FAA1D67D6}"/>
               </a:ext>
             </a:extLst>
           </p:cNvPr>
@@ -13967,7 +14672,7 @@
         </p:nvSpPr>
         <p:spPr>
           <a:xfrm>
-            <a:off x="584963" y="1003999"/>
+            <a:off x="313500" y="1388130"/>
             <a:ext cx="9071640" cy="946440"/>
           </a:xfrm>
         </p:spPr>
@@ -13976,17 +14681,47 @@
           <a:lstStyle/>
           <a:p>
             <a:r>
+              <a:rPr lang="en-US" altLang="ko-KR" dirty="0"/>
+              <a:t>MPSC </a:t>
+            </a:r>
+            <a:r>
+              <a:rPr lang="ko-KR" altLang="en-US" dirty="0"/>
+              <a:t>큐 성능 비교 분석 </a:t>
+            </a:r>
+            <a:r>
+              <a:rPr lang="en-US" altLang="ko-KR" dirty="0"/>
+              <a:t>+ </a:t>
+            </a:r>
+            <a:r>
               <a:rPr lang="ko-KR" altLang="en-US" dirty="0" err="1"/>
-              <a:t>행동트리</a:t>
-            </a:r>
-            <a:endParaRPr lang="ko-KR" altLang="en-US" dirty="0"/>
+              <a:t>동접측정</a:t>
+            </a:r>
+            <a:endParaRPr lang="en-US" altLang="ko-KR" dirty="0"/>
+          </a:p>
+          <a:p>
+            <a:r>
+              <a:rPr lang="en-US" altLang="ko-KR" dirty="0"/>
+              <a:t>+ Session </a:t>
+            </a:r>
+            <a:r>
+              <a:rPr lang="en-US" altLang="ko-KR" dirty="0" err="1"/>
+              <a:t>recv</a:t>
+            </a:r>
+            <a:r>
+              <a:rPr lang="en-US" altLang="ko-KR" dirty="0"/>
+              <a:t> / send </a:t>
+            </a:r>
+            <a:r>
+              <a:rPr lang="ko-KR" altLang="en-US" dirty="0"/>
+              <a:t>구조</a:t>
+            </a:r>
           </a:p>
         </p:txBody>
       </p:sp>
     </p:spTree>
     <p:extLst>
       <p:ext uri="{BB962C8B-B14F-4D97-AF65-F5344CB8AC3E}">
-        <p14:creationId xmlns:p14="http://schemas.microsoft.com/office/powerpoint/2010/main" val="4024580557"/>
+        <p14:creationId xmlns:p14="http://schemas.microsoft.com/office/powerpoint/2010/main" val="1205077931"/>
       </p:ext>
     </p:extLst>
   </p:cSld>
@@ -14018,7 +14753,7 @@
           <p:cNvPr id="2" name="제목 1">
             <a:extLst>
               <a:ext uri="{FF2B5EF4-FFF2-40B4-BE49-F238E27FC236}">
-                <a16:creationId xmlns:a16="http://schemas.microsoft.com/office/drawing/2014/main" id="{4306B8E9-AB07-B3E3-4732-4364D058CA92}"/>
+                <a16:creationId xmlns:a16="http://schemas.microsoft.com/office/drawing/2014/main" id="{E4203474-3E2E-50C7-15E1-B335EF40B864}"/>
               </a:ext>
             </a:extLst>
           </p:cNvPr>
@@ -14041,7 +14776,7 @@
           <a:p>
             <a:r>
               <a:rPr lang="en-US" altLang="ko-KR" dirty="0"/>
-              <a:t>4.3 </a:t>
+              <a:t>4.2 </a:t>
             </a:r>
             <a:r>
               <a:rPr lang="ko-KR" altLang="en-US" dirty="0"/>
@@ -14049,11 +14784,11 @@
             </a:r>
             <a:r>
               <a:rPr lang="en-US" altLang="ko-KR" dirty="0"/>
-              <a:t>– </a:t>
+              <a:t>- </a:t>
             </a:r>
             <a:r>
               <a:rPr lang="ko-KR" altLang="en-US" dirty="0"/>
-              <a:t>기술요소</a:t>
+              <a:t>서버구조</a:t>
             </a:r>
           </a:p>
         </p:txBody>
@@ -14063,7 +14798,7 @@
           <p:cNvPr id="3" name="텍스트 개체 틀 2">
             <a:extLst>
               <a:ext uri="{FF2B5EF4-FFF2-40B4-BE49-F238E27FC236}">
-                <a16:creationId xmlns:a16="http://schemas.microsoft.com/office/drawing/2014/main" id="{24A5F4CD-E379-B449-ACEE-1F0E16DA1196}"/>
+                <a16:creationId xmlns:a16="http://schemas.microsoft.com/office/drawing/2014/main" id="{29E0250D-2782-017E-8E50-B045401E77C0}"/>
               </a:ext>
             </a:extLst>
           </p:cNvPr>
@@ -14076,7 +14811,7 @@
         </p:nvSpPr>
         <p:spPr>
           <a:xfrm>
-            <a:off x="418275" y="1888835"/>
+            <a:off x="546863" y="1226205"/>
             <a:ext cx="9071640" cy="946440"/>
           </a:xfrm>
         </p:spPr>
@@ -14084,40 +14819,38 @@
           <a:bodyPr/>
           <a:lstStyle/>
           <a:p>
+            <a:pPr marL="0" indent="0">
+              <a:buNone/>
+            </a:pPr>
+            <a:r>
+              <a:rPr lang="ko-KR" altLang="en-US" dirty="0"/>
+              <a:t>클러스터 업데이트 큐를 이용한 그림</a:t>
+            </a:r>
+            <a:endParaRPr lang="en-US" altLang="ko-KR" dirty="0"/>
+          </a:p>
+          <a:p>
+            <a:pPr marL="0" indent="0">
+              <a:buNone/>
+            </a:pPr>
+            <a:r>
+              <a:rPr lang="en-US" altLang="ko-KR" dirty="0"/>
+              <a:t>+ </a:t>
+            </a:r>
             <a:r>
               <a:rPr lang="ko-KR" altLang="en-US" dirty="0" err="1"/>
-              <a:t>보간을</a:t>
+              <a:t>동접</a:t>
             </a:r>
             <a:r>
               <a:rPr lang="ko-KR" altLang="en-US" dirty="0"/>
-              <a:t> 이용해 패킷 동기화 주기를 </a:t>
-            </a:r>
-            <a:r>
-              <a:rPr lang="en-US" altLang="ko-KR" dirty="0"/>
-              <a:t>0.5</a:t>
+              <a:t> </a:t>
+            </a:r>
+            <a:r>
+              <a:rPr lang="en-US" altLang="ko-KR" dirty="0"/>
+              <a:t>9</a:t>
             </a:r>
             <a:r>
               <a:rPr lang="ko-KR" altLang="en-US" dirty="0"/>
-              <a:t>초로</a:t>
-            </a:r>
-            <a:endParaRPr lang="en-US" altLang="ko-KR" dirty="0"/>
-          </a:p>
-          <a:p>
-            <a:r>
-              <a:rPr lang="ko-KR" altLang="en-US" dirty="0" err="1"/>
-              <a:t>인던같은</a:t>
-            </a:r>
-            <a:r>
-              <a:rPr lang="ko-KR" altLang="en-US" dirty="0"/>
-              <a:t> 곳은 </a:t>
-            </a:r>
-            <a:r>
-              <a:rPr lang="en-US" altLang="ko-KR" dirty="0"/>
-              <a:t>0.1</a:t>
-            </a:r>
-            <a:r>
-              <a:rPr lang="ko-KR" altLang="en-US" dirty="0"/>
-              <a:t>초로 유동적으로 조절 가능</a:t>
+              <a:t>천 짤 제시</a:t>
             </a:r>
           </a:p>
         </p:txBody>
@@ -14125,7 +14858,7 @@
     </p:spTree>
     <p:extLst>
       <p:ext uri="{BB962C8B-B14F-4D97-AF65-F5344CB8AC3E}">
-        <p14:creationId xmlns:p14="http://schemas.microsoft.com/office/powerpoint/2010/main" val="2220899220"/>
+        <p14:creationId xmlns:p14="http://schemas.microsoft.com/office/powerpoint/2010/main" val="3223149513"/>
       </p:ext>
     </p:extLst>
   </p:cSld>
@@ -14157,7 +14890,7 @@
           <p:cNvPr id="2" name="제목 1">
             <a:extLst>
               <a:ext uri="{FF2B5EF4-FFF2-40B4-BE49-F238E27FC236}">
-                <a16:creationId xmlns:a16="http://schemas.microsoft.com/office/drawing/2014/main" id="{7A66AC24-CD5F-AAFB-6D78-00BA99116990}"/>
+                <a16:creationId xmlns:a16="http://schemas.microsoft.com/office/drawing/2014/main" id="{052EAB5F-5E66-C504-E872-6E530EDFF2CC}"/>
               </a:ext>
             </a:extLst>
           </p:cNvPr>
@@ -14202,7 +14935,7 @@
           <p:cNvPr id="3" name="텍스트 개체 틀 2">
             <a:extLst>
               <a:ext uri="{FF2B5EF4-FFF2-40B4-BE49-F238E27FC236}">
-                <a16:creationId xmlns:a16="http://schemas.microsoft.com/office/drawing/2014/main" id="{4AB83B4A-F2F0-A5A2-9D32-2DA8727152D8}"/>
+                <a16:creationId xmlns:a16="http://schemas.microsoft.com/office/drawing/2014/main" id="{4E554613-DC40-892F-F3B8-5432B9A1742C}"/>
               </a:ext>
             </a:extLst>
           </p:cNvPr>
@@ -14215,7 +14948,7 @@
         </p:nvSpPr>
         <p:spPr>
           <a:xfrm>
-            <a:off x="504000" y="1003999"/>
+            <a:off x="504000" y="1230968"/>
             <a:ext cx="9071640" cy="946440"/>
           </a:xfrm>
         </p:spPr>
@@ -14224,32 +14957,41 @@
           <a:lstStyle/>
           <a:p>
             <a:r>
-              <a:rPr lang="en-US" altLang="ko-KR" dirty="0"/>
-              <a:t>Cluster </a:t>
+              <a:rPr lang="ko-KR" altLang="en-US" dirty="0" err="1"/>
+              <a:t>제로바이트</a:t>
             </a:r>
             <a:r>
               <a:rPr lang="ko-KR" altLang="en-US" dirty="0"/>
-              <a:t>공간분할 </a:t>
-            </a:r>
-            <a:r>
-              <a:rPr lang="en-US" altLang="ko-KR" dirty="0"/>
-              <a:t>vs </a:t>
+              <a:t> 리시브 </a:t>
+            </a:r>
+            <a:r>
+              <a:rPr lang="en-US" altLang="ko-KR" dirty="0"/>
+              <a:t>( vs before after , </a:t>
             </a:r>
             <a:r>
               <a:rPr lang="ko-KR" altLang="en-US" dirty="0" err="1"/>
-              <a:t>안한거</a:t>
+              <a:t>콘커런시</a:t>
             </a:r>
             <a:r>
               <a:rPr lang="ko-KR" altLang="en-US" dirty="0"/>
-              <a:t> 성능비교분석</a:t>
-            </a:r>
+              <a:t> </a:t>
+            </a:r>
+            <a:r>
+              <a:rPr lang="ko-KR" altLang="en-US" dirty="0" err="1"/>
+              <a:t>비주얼라이저</a:t>
+            </a:r>
+            <a:r>
+              <a:rPr lang="en-US" altLang="ko-KR" dirty="0"/>
+              <a:t>)</a:t>
+            </a:r>
+            <a:endParaRPr lang="ko-KR" altLang="en-US" dirty="0"/>
           </a:p>
         </p:txBody>
       </p:sp>
     </p:spTree>
     <p:extLst>
       <p:ext uri="{BB962C8B-B14F-4D97-AF65-F5344CB8AC3E}">
-        <p14:creationId xmlns:p14="http://schemas.microsoft.com/office/powerpoint/2010/main" val="2434738147"/>
+        <p14:creationId xmlns:p14="http://schemas.microsoft.com/office/powerpoint/2010/main" val="2950612311"/>
       </p:ext>
     </p:extLst>
   </p:cSld>
@@ -14281,7 +15023,7 @@
           <p:cNvPr id="2" name="제목 1">
             <a:extLst>
               <a:ext uri="{FF2B5EF4-FFF2-40B4-BE49-F238E27FC236}">
-                <a16:creationId xmlns:a16="http://schemas.microsoft.com/office/drawing/2014/main" id="{EF7751A6-21E4-DCA8-1649-A6670C167CA9}"/>
+                <a16:creationId xmlns:a16="http://schemas.microsoft.com/office/drawing/2014/main" id="{27793B23-368E-1800-A97C-D417D26BD0B4}"/>
               </a:ext>
             </a:extLst>
           </p:cNvPr>
@@ -14326,7 +15068,7 @@
           <p:cNvPr id="3" name="텍스트 개체 틀 2">
             <a:extLst>
               <a:ext uri="{FF2B5EF4-FFF2-40B4-BE49-F238E27FC236}">
-                <a16:creationId xmlns:a16="http://schemas.microsoft.com/office/drawing/2014/main" id="{31D58851-0B3B-4980-0188-3CE23EBDD974}"/>
+                <a16:creationId xmlns:a16="http://schemas.microsoft.com/office/drawing/2014/main" id="{55DAF0E3-6C85-1D58-326C-7D817B657B1A}"/>
               </a:ext>
             </a:extLst>
           </p:cNvPr>
@@ -14339,7 +15081,7 @@
         </p:nvSpPr>
         <p:spPr>
           <a:xfrm>
-            <a:off x="504000" y="1116667"/>
+            <a:off x="584963" y="1003999"/>
             <a:ext cx="9071640" cy="946440"/>
           </a:xfrm>
         </p:spPr>
@@ -14348,20 +15090,17 @@
           <a:lstStyle/>
           <a:p>
             <a:r>
-              <a:rPr lang="en-US" altLang="ko-KR" dirty="0"/>
-              <a:t>ECS </a:t>
-            </a:r>
-            <a:r>
-              <a:rPr lang="ko-KR" altLang="en-US" dirty="0"/>
-              <a:t>구조 및 컴파일타임 해시함수</a:t>
-            </a:r>
+              <a:rPr lang="ko-KR" altLang="en-US" dirty="0" err="1"/>
+              <a:t>행동트리</a:t>
+            </a:r>
+            <a:endParaRPr lang="ko-KR" altLang="en-US" dirty="0"/>
           </a:p>
         </p:txBody>
       </p:sp>
     </p:spTree>
     <p:extLst>
       <p:ext uri="{BB962C8B-B14F-4D97-AF65-F5344CB8AC3E}">
-        <p14:creationId xmlns:p14="http://schemas.microsoft.com/office/powerpoint/2010/main" val="3360342075"/>
+        <p14:creationId xmlns:p14="http://schemas.microsoft.com/office/powerpoint/2010/main" val="4024580557"/>
       </p:ext>
     </p:extLst>
   </p:cSld>
@@ -15900,6 +16639,381 @@
           <p:cNvPr id="2" name="제목 1">
             <a:extLst>
               <a:ext uri="{FF2B5EF4-FFF2-40B4-BE49-F238E27FC236}">
+                <a16:creationId xmlns:a16="http://schemas.microsoft.com/office/drawing/2014/main" id="{4306B8E9-AB07-B3E3-4732-4364D058CA92}"/>
+              </a:ext>
+            </a:extLst>
+          </p:cNvPr>
+          <p:cNvSpPr>
+            <a:spLocks noGrp="1"/>
+          </p:cNvSpPr>
+          <p:nvPr>
+            <p:ph type="title"/>
+          </p:nvPr>
+        </p:nvSpPr>
+        <p:spPr>
+          <a:xfrm>
+            <a:off x="504000" y="394601"/>
+            <a:ext cx="9071640" cy="609398"/>
+          </a:xfrm>
+        </p:spPr>
+        <p:txBody>
+          <a:bodyPr/>
+          <a:lstStyle/>
+          <a:p>
+            <a:r>
+              <a:rPr lang="en-US" altLang="ko-KR" dirty="0"/>
+              <a:t>4.3 </a:t>
+            </a:r>
+            <a:r>
+              <a:rPr lang="ko-KR" altLang="en-US" dirty="0"/>
+              <a:t>졸작 </a:t>
+            </a:r>
+            <a:r>
+              <a:rPr lang="en-US" altLang="ko-KR" dirty="0"/>
+              <a:t>– </a:t>
+            </a:r>
+            <a:r>
+              <a:rPr lang="ko-KR" altLang="en-US" dirty="0"/>
+              <a:t>기술요소</a:t>
+            </a:r>
+          </a:p>
+        </p:txBody>
+      </p:sp>
+      <p:sp>
+        <p:nvSpPr>
+          <p:cNvPr id="3" name="텍스트 개체 틀 2">
+            <a:extLst>
+              <a:ext uri="{FF2B5EF4-FFF2-40B4-BE49-F238E27FC236}">
+                <a16:creationId xmlns:a16="http://schemas.microsoft.com/office/drawing/2014/main" id="{24A5F4CD-E379-B449-ACEE-1F0E16DA1196}"/>
+              </a:ext>
+            </a:extLst>
+          </p:cNvPr>
+          <p:cNvSpPr>
+            <a:spLocks noGrp="1"/>
+          </p:cNvSpPr>
+          <p:nvPr>
+            <p:ph type="body"/>
+          </p:nvPr>
+        </p:nvSpPr>
+        <p:spPr>
+          <a:xfrm>
+            <a:off x="418275" y="1888835"/>
+            <a:ext cx="9071640" cy="946440"/>
+          </a:xfrm>
+        </p:spPr>
+        <p:txBody>
+          <a:bodyPr/>
+          <a:lstStyle/>
+          <a:p>
+            <a:r>
+              <a:rPr lang="ko-KR" altLang="en-US" dirty="0" err="1"/>
+              <a:t>보간을</a:t>
+            </a:r>
+            <a:r>
+              <a:rPr lang="ko-KR" altLang="en-US" dirty="0"/>
+              <a:t> 이용해 패킷 동기화 주기를 </a:t>
+            </a:r>
+            <a:r>
+              <a:rPr lang="en-US" altLang="ko-KR" dirty="0"/>
+              <a:t>0.5</a:t>
+            </a:r>
+            <a:r>
+              <a:rPr lang="ko-KR" altLang="en-US" dirty="0"/>
+              <a:t>초로</a:t>
+            </a:r>
+            <a:endParaRPr lang="en-US" altLang="ko-KR" dirty="0"/>
+          </a:p>
+          <a:p>
+            <a:r>
+              <a:rPr lang="ko-KR" altLang="en-US" dirty="0" err="1"/>
+              <a:t>인던같은</a:t>
+            </a:r>
+            <a:r>
+              <a:rPr lang="ko-KR" altLang="en-US" dirty="0"/>
+              <a:t> 곳은 </a:t>
+            </a:r>
+            <a:r>
+              <a:rPr lang="en-US" altLang="ko-KR" dirty="0"/>
+              <a:t>0.1</a:t>
+            </a:r>
+            <a:r>
+              <a:rPr lang="ko-KR" altLang="en-US" dirty="0"/>
+              <a:t>초로 유동적으로 조절 가능</a:t>
+            </a:r>
+          </a:p>
+        </p:txBody>
+      </p:sp>
+    </p:spTree>
+    <p:extLst>
+      <p:ext uri="{BB962C8B-B14F-4D97-AF65-F5344CB8AC3E}">
+        <p14:creationId xmlns:p14="http://schemas.microsoft.com/office/powerpoint/2010/main" val="2220899220"/>
+      </p:ext>
+    </p:extLst>
+  </p:cSld>
+  <p:clrMapOvr>
+    <a:masterClrMapping/>
+  </p:clrMapOvr>
+</p:sld>
+</file>
+
+<file path=ppt/slides/slide41.xml><?xml version="1.0" encoding="utf-8"?>
+<p:sld xmlns:a="http://schemas.openxmlformats.org/drawingml/2006/main" xmlns:r="http://schemas.openxmlformats.org/officeDocument/2006/relationships" xmlns:p="http://schemas.openxmlformats.org/presentationml/2006/main">
+  <p:cSld>
+    <p:spTree>
+      <p:nvGrpSpPr>
+        <p:cNvPr id="1" name=""/>
+        <p:cNvGrpSpPr/>
+        <p:nvPr/>
+      </p:nvGrpSpPr>
+      <p:grpSpPr>
+        <a:xfrm>
+          <a:off x="0" y="0"/>
+          <a:ext cx="0" cy="0"/>
+          <a:chOff x="0" y="0"/>
+          <a:chExt cx="0" cy="0"/>
+        </a:xfrm>
+      </p:grpSpPr>
+      <p:sp>
+        <p:nvSpPr>
+          <p:cNvPr id="2" name="제목 1">
+            <a:extLst>
+              <a:ext uri="{FF2B5EF4-FFF2-40B4-BE49-F238E27FC236}">
+                <a16:creationId xmlns:a16="http://schemas.microsoft.com/office/drawing/2014/main" id="{7A66AC24-CD5F-AAFB-6D78-00BA99116990}"/>
+              </a:ext>
+            </a:extLst>
+          </p:cNvPr>
+          <p:cNvSpPr>
+            <a:spLocks noGrp="1"/>
+          </p:cNvSpPr>
+          <p:nvPr>
+            <p:ph type="title"/>
+          </p:nvPr>
+        </p:nvSpPr>
+        <p:spPr>
+          <a:xfrm>
+            <a:off x="504000" y="394601"/>
+            <a:ext cx="9071640" cy="609398"/>
+          </a:xfrm>
+        </p:spPr>
+        <p:txBody>
+          <a:bodyPr/>
+          <a:lstStyle/>
+          <a:p>
+            <a:r>
+              <a:rPr lang="en-US" altLang="ko-KR" dirty="0"/>
+              <a:t>4.3 </a:t>
+            </a:r>
+            <a:r>
+              <a:rPr lang="ko-KR" altLang="en-US" dirty="0"/>
+              <a:t>졸작 </a:t>
+            </a:r>
+            <a:r>
+              <a:rPr lang="en-US" altLang="ko-KR" dirty="0"/>
+              <a:t>– </a:t>
+            </a:r>
+            <a:r>
+              <a:rPr lang="ko-KR" altLang="en-US" dirty="0"/>
+              <a:t>기술요소</a:t>
+            </a:r>
+          </a:p>
+        </p:txBody>
+      </p:sp>
+      <p:sp>
+        <p:nvSpPr>
+          <p:cNvPr id="3" name="텍스트 개체 틀 2">
+            <a:extLst>
+              <a:ext uri="{FF2B5EF4-FFF2-40B4-BE49-F238E27FC236}">
+                <a16:creationId xmlns:a16="http://schemas.microsoft.com/office/drawing/2014/main" id="{4AB83B4A-F2F0-A5A2-9D32-2DA8727152D8}"/>
+              </a:ext>
+            </a:extLst>
+          </p:cNvPr>
+          <p:cNvSpPr>
+            <a:spLocks noGrp="1"/>
+          </p:cNvSpPr>
+          <p:nvPr>
+            <p:ph type="body"/>
+          </p:nvPr>
+        </p:nvSpPr>
+        <p:spPr>
+          <a:xfrm>
+            <a:off x="504000" y="1003999"/>
+            <a:ext cx="9071640" cy="946440"/>
+          </a:xfrm>
+        </p:spPr>
+        <p:txBody>
+          <a:bodyPr/>
+          <a:lstStyle/>
+          <a:p>
+            <a:r>
+              <a:rPr lang="en-US" altLang="ko-KR" dirty="0"/>
+              <a:t>Cluster </a:t>
+            </a:r>
+            <a:r>
+              <a:rPr lang="ko-KR" altLang="en-US" dirty="0"/>
+              <a:t>공간분할 </a:t>
+            </a:r>
+            <a:r>
+              <a:rPr lang="en-US" altLang="ko-KR" dirty="0"/>
+              <a:t>vs </a:t>
+            </a:r>
+            <a:r>
+              <a:rPr lang="ko-KR" altLang="en-US" dirty="0" err="1"/>
+              <a:t>안한거</a:t>
+            </a:r>
+            <a:r>
+              <a:rPr lang="ko-KR" altLang="en-US" dirty="0"/>
+              <a:t> 성능비교분석</a:t>
+            </a:r>
+          </a:p>
+        </p:txBody>
+      </p:sp>
+    </p:spTree>
+    <p:extLst>
+      <p:ext uri="{BB962C8B-B14F-4D97-AF65-F5344CB8AC3E}">
+        <p14:creationId xmlns:p14="http://schemas.microsoft.com/office/powerpoint/2010/main" val="2434738147"/>
+      </p:ext>
+    </p:extLst>
+  </p:cSld>
+  <p:clrMapOvr>
+    <a:masterClrMapping/>
+  </p:clrMapOvr>
+</p:sld>
+</file>
+
+<file path=ppt/slides/slide42.xml><?xml version="1.0" encoding="utf-8"?>
+<p:sld xmlns:a="http://schemas.openxmlformats.org/drawingml/2006/main" xmlns:r="http://schemas.openxmlformats.org/officeDocument/2006/relationships" xmlns:p="http://schemas.openxmlformats.org/presentationml/2006/main">
+  <p:cSld>
+    <p:spTree>
+      <p:nvGrpSpPr>
+        <p:cNvPr id="1" name=""/>
+        <p:cNvGrpSpPr/>
+        <p:nvPr/>
+      </p:nvGrpSpPr>
+      <p:grpSpPr>
+        <a:xfrm>
+          <a:off x="0" y="0"/>
+          <a:ext cx="0" cy="0"/>
+          <a:chOff x="0" y="0"/>
+          <a:chExt cx="0" cy="0"/>
+        </a:xfrm>
+      </p:grpSpPr>
+      <p:sp>
+        <p:nvSpPr>
+          <p:cNvPr id="2" name="제목 1">
+            <a:extLst>
+              <a:ext uri="{FF2B5EF4-FFF2-40B4-BE49-F238E27FC236}">
+                <a16:creationId xmlns:a16="http://schemas.microsoft.com/office/drawing/2014/main" id="{EF7751A6-21E4-DCA8-1649-A6670C167CA9}"/>
+              </a:ext>
+            </a:extLst>
+          </p:cNvPr>
+          <p:cNvSpPr>
+            <a:spLocks noGrp="1"/>
+          </p:cNvSpPr>
+          <p:nvPr>
+            <p:ph type="title"/>
+          </p:nvPr>
+        </p:nvSpPr>
+        <p:spPr>
+          <a:xfrm>
+            <a:off x="504000" y="394601"/>
+            <a:ext cx="9071640" cy="609398"/>
+          </a:xfrm>
+        </p:spPr>
+        <p:txBody>
+          <a:bodyPr/>
+          <a:lstStyle/>
+          <a:p>
+            <a:r>
+              <a:rPr lang="en-US" altLang="ko-KR" dirty="0"/>
+              <a:t>4.3 </a:t>
+            </a:r>
+            <a:r>
+              <a:rPr lang="ko-KR" altLang="en-US" dirty="0"/>
+              <a:t>졸작 </a:t>
+            </a:r>
+            <a:r>
+              <a:rPr lang="en-US" altLang="ko-KR" dirty="0"/>
+              <a:t>– </a:t>
+            </a:r>
+            <a:r>
+              <a:rPr lang="ko-KR" altLang="en-US" dirty="0"/>
+              <a:t>기술요소</a:t>
+            </a:r>
+          </a:p>
+        </p:txBody>
+      </p:sp>
+      <p:sp>
+        <p:nvSpPr>
+          <p:cNvPr id="3" name="텍스트 개체 틀 2">
+            <a:extLst>
+              <a:ext uri="{FF2B5EF4-FFF2-40B4-BE49-F238E27FC236}">
+                <a16:creationId xmlns:a16="http://schemas.microsoft.com/office/drawing/2014/main" id="{31D58851-0B3B-4980-0188-3CE23EBDD974}"/>
+              </a:ext>
+            </a:extLst>
+          </p:cNvPr>
+          <p:cNvSpPr>
+            <a:spLocks noGrp="1"/>
+          </p:cNvSpPr>
+          <p:nvPr>
+            <p:ph type="body"/>
+          </p:nvPr>
+        </p:nvSpPr>
+        <p:spPr>
+          <a:xfrm>
+            <a:off x="504000" y="1116667"/>
+            <a:ext cx="9071640" cy="946440"/>
+          </a:xfrm>
+        </p:spPr>
+        <p:txBody>
+          <a:bodyPr/>
+          <a:lstStyle/>
+          <a:p>
+            <a:r>
+              <a:rPr lang="en-US" altLang="ko-KR" dirty="0"/>
+              <a:t>ECS </a:t>
+            </a:r>
+            <a:r>
+              <a:rPr lang="ko-KR" altLang="en-US" dirty="0"/>
+              <a:t>구조 및 컴파일타임 해시함수</a:t>
+            </a:r>
+          </a:p>
+        </p:txBody>
+      </p:sp>
+    </p:spTree>
+    <p:extLst>
+      <p:ext uri="{BB962C8B-B14F-4D97-AF65-F5344CB8AC3E}">
+        <p14:creationId xmlns:p14="http://schemas.microsoft.com/office/powerpoint/2010/main" val="3360342075"/>
+      </p:ext>
+    </p:extLst>
+  </p:cSld>
+  <p:clrMapOvr>
+    <a:masterClrMapping/>
+  </p:clrMapOvr>
+</p:sld>
+</file>
+
+<file path=ppt/slides/slide43.xml><?xml version="1.0" encoding="utf-8"?>
+<p:sld xmlns:a="http://schemas.openxmlformats.org/drawingml/2006/main" xmlns:r="http://schemas.openxmlformats.org/officeDocument/2006/relationships" xmlns:p="http://schemas.openxmlformats.org/presentationml/2006/main">
+  <p:cSld>
+    <p:spTree>
+      <p:nvGrpSpPr>
+        <p:cNvPr id="1" name=""/>
+        <p:cNvGrpSpPr/>
+        <p:nvPr/>
+      </p:nvGrpSpPr>
+      <p:grpSpPr>
+        <a:xfrm>
+          <a:off x="0" y="0"/>
+          <a:ext cx="0" cy="0"/>
+          <a:chOff x="0" y="0"/>
+          <a:chExt cx="0" cy="0"/>
+        </a:xfrm>
+      </p:grpSpPr>
+      <p:sp>
+        <p:nvSpPr>
+          <p:cNvPr id="2" name="제목 1">
+            <a:extLst>
+              <a:ext uri="{FF2B5EF4-FFF2-40B4-BE49-F238E27FC236}">
                 <a16:creationId xmlns:a16="http://schemas.microsoft.com/office/drawing/2014/main" id="{A030B946-D85D-BE2F-9C5B-712A9A53E705}"/>
               </a:ext>
             </a:extLst>

--- a/포트폴리오/서버_최재혁/포트폴리오.pptx
+++ b/포트폴리오/서버_최재혁/포트폴리오.pptx
@@ -2249,11 +2249,44 @@
           <a:p>
             <a:pPr algn="ctr"/>
             <a:r>
-              <a:rPr lang="en-US" sz="4400" b="0" strike="noStrike" spc="-1">
+              <a:rPr lang="en-US" sz="4400" b="0" strike="noStrike" spc="-1" dirty="0">
                 <a:latin typeface="굴림"/>
               </a:rPr>
-              <a:t>1. 자기소개 들어갈 자리</a:t>
-            </a:r>
+              <a:t>1. </a:t>
+            </a:r>
+            <a:r>
+              <a:rPr lang="en-US" sz="4400" b="0" strike="noStrike" spc="-1" dirty="0" err="1">
+                <a:latin typeface="굴림"/>
+              </a:rPr>
+              <a:t>자기소개</a:t>
+            </a:r>
+            <a:r>
+              <a:rPr lang="en-US" sz="4400" b="0" strike="noStrike" spc="-1" dirty="0">
+                <a:latin typeface="굴림"/>
+              </a:rPr>
+              <a:t> </a:t>
+            </a:r>
+            <a:r>
+              <a:rPr lang="en-US" sz="4400" b="0" strike="noStrike" spc="-1" dirty="0" err="1">
+                <a:latin typeface="굴림"/>
+              </a:rPr>
+              <a:t>들어갈</a:t>
+            </a:r>
+            <a:r>
+              <a:rPr lang="en-US" sz="4400" b="0" strike="noStrike" spc="-1" dirty="0">
+                <a:latin typeface="굴림"/>
+              </a:rPr>
+              <a:t> </a:t>
+            </a:r>
+            <a:r>
+              <a:rPr lang="en-US" sz="4400" b="0" strike="noStrike" spc="-1" dirty="0" err="1">
+                <a:latin typeface="굴림"/>
+              </a:rPr>
+              <a:t>자리</a:t>
+            </a:r>
+            <a:endParaRPr lang="en-US" sz="4400" b="0" strike="noStrike" spc="-1" dirty="0">
+              <a:latin typeface="굴림"/>
+            </a:endParaRPr>
           </a:p>
         </p:txBody>
       </p:sp>
@@ -2284,16 +2317,25 @@
           <a:p>
             <a:pPr algn="ctr"/>
             <a:r>
-              <a:rPr lang="en-US" sz="3200" b="0" strike="noStrike" spc="-1">
+              <a:rPr lang="en-US" sz="3200" b="0" strike="noStrike" spc="-1" dirty="0">
                 <a:latin typeface="굴림"/>
               </a:rPr>
-              <a:t>1. 신상정보</a:t>
-            </a:r>
+              <a:t>1. </a:t>
+            </a:r>
+            <a:r>
+              <a:rPr lang="en-US" sz="3200" b="0" strike="noStrike" spc="-1" dirty="0" err="1">
+                <a:latin typeface="굴림"/>
+              </a:rPr>
+              <a:t>신상정보</a:t>
+            </a:r>
+            <a:endParaRPr lang="en-US" sz="3200" b="0" strike="noStrike" spc="-1" dirty="0">
+              <a:latin typeface="굴림"/>
+            </a:endParaRPr>
           </a:p>
           <a:p>
             <a:pPr algn="ctr"/>
             <a:r>
-              <a:rPr lang="en-US" sz="3200" b="0" strike="noStrike" spc="-1">
+              <a:rPr lang="en-US" sz="3200" b="0" strike="noStrike" spc="-1" dirty="0">
                 <a:latin typeface="굴림"/>
               </a:rPr>
               <a:t>2.학력</a:t>
@@ -2302,7 +2344,7 @@
           <a:p>
             <a:pPr algn="ctr"/>
             <a:r>
-              <a:rPr lang="en-US" sz="3200" b="0" strike="noStrike" spc="-1">
+              <a:rPr lang="en-US" sz="3200" b="0" strike="noStrike" spc="-1" dirty="0">
                 <a:latin typeface="굴림"/>
               </a:rPr>
               <a:t>3.기술</a:t>
@@ -6289,27 +6331,11 @@
             </a:r>
             <a:r>
               <a:rPr lang="ko-KR" altLang="en-US" sz="1400" dirty="0" err="1"/>
-              <a:t>프리큐처럼</a:t>
+              <a:t>프리큐는</a:t>
             </a:r>
             <a:r>
               <a:rPr lang="ko-KR" altLang="en-US" sz="1400" dirty="0"/>
-              <a:t> 대중적인 </a:t>
-            </a:r>
-            <a:r>
-              <a:rPr lang="ko-KR" altLang="en-US" sz="1400" dirty="0" err="1"/>
-              <a:t>락</a:t>
-            </a:r>
-            <a:r>
-              <a:rPr lang="ko-KR" altLang="en-US" sz="1400" dirty="0"/>
-              <a:t> 프리 자료구조가 찾아서 안 </a:t>
-            </a:r>
-            <a:r>
-              <a:rPr lang="ko-KR" altLang="en-US" sz="1400" dirty="0" err="1"/>
-              <a:t>나올리가</a:t>
-            </a:r>
-            <a:r>
-              <a:rPr lang="ko-KR" altLang="en-US" sz="1400" dirty="0"/>
-              <a:t> 없음</a:t>
+              <a:t> 여러 곳에서 제작한 자료구조가 이미 존재</a:t>
             </a:r>
             <a:endParaRPr lang="en-US" altLang="ko-KR" sz="1400" dirty="0"/>
           </a:p>
@@ -8338,15 +8364,7 @@
             </a:r>
             <a:r>
               <a:rPr lang="ko-KR" altLang="en-US" sz="1600" dirty="0"/>
-              <a:t>하지만 </a:t>
-            </a:r>
-            <a:r>
-              <a:rPr lang="ko-KR" altLang="en-US" sz="1600" dirty="0" err="1"/>
-              <a:t>하지만</a:t>
-            </a:r>
-            <a:r>
-              <a:rPr lang="ko-KR" altLang="en-US" sz="1600" dirty="0"/>
-              <a:t> 이럴 경우 </a:t>
+              <a:t>하지만 이럴 경우 </a:t>
             </a:r>
             <a:r>
               <a:rPr lang="en-US" altLang="ko-KR" sz="1600" dirty="0"/>
@@ -9784,8 +9802,8 @@
         </p:blipFill>
         <p:spPr>
           <a:xfrm>
-            <a:off x="230187" y="1277937"/>
-            <a:ext cx="6962775" cy="4079876"/>
+            <a:off x="107095" y="1383445"/>
+            <a:ext cx="7146193" cy="4079876"/>
           </a:xfrm>
           <a:prstGeom prst="rect">
             <a:avLst/>
@@ -9806,7 +9824,7 @@
         </p:nvSpPr>
         <p:spPr>
           <a:xfrm>
-            <a:off x="7253288" y="4086226"/>
+            <a:off x="7358795" y="4127942"/>
             <a:ext cx="2425700" cy="1077218"/>
           </a:xfrm>
           <a:prstGeom prst="rect">
@@ -13518,8 +13536,8 @@
         </p:nvSpPr>
         <p:spPr>
           <a:xfrm>
-            <a:off x="504000" y="1188762"/>
-            <a:ext cx="9071640" cy="2683426"/>
+            <a:off x="504000" y="1006981"/>
+            <a:ext cx="9071640" cy="3046988"/>
           </a:xfrm>
         </p:spPr>
         <p:txBody>
@@ -13553,7 +13571,19 @@
             </a:r>
             <a:r>
               <a:rPr lang="ko-KR" altLang="en-US" dirty="0"/>
-              <a:t>큐 </a:t>
+              <a:t>큐</a:t>
+            </a:r>
+            <a:r>
+              <a:rPr lang="en-US" altLang="ko-KR" dirty="0"/>
+              <a:t>, Custom </a:t>
+            </a:r>
+            <a:r>
+              <a:rPr lang="en-US" altLang="ko-KR" dirty="0" err="1"/>
+              <a:t>Shared_ptr</a:t>
+            </a:r>
+            <a:r>
+              <a:rPr lang="ko-KR" altLang="en-US" dirty="0"/>
+              <a:t> </a:t>
             </a:r>
           </a:p>
           <a:p>
@@ -15187,14 +15217,14 @@
           <p:nvPr>
             <p:extLst>
               <p:ext uri="{D42A27DB-BD31-4B8C-83A1-F6EECF244321}">
-                <p14:modId xmlns:p14="http://schemas.microsoft.com/office/powerpoint/2010/main" val="3973236727"/>
+                <p14:modId xmlns:p14="http://schemas.microsoft.com/office/powerpoint/2010/main" val="4093127292"/>
               </p:ext>
             </p:extLst>
           </p:nvPr>
         </p:nvGraphicFramePr>
         <p:xfrm>
-          <a:off x="4108450" y="-45316"/>
-          <a:ext cx="5803900" cy="5394504"/>
+          <a:off x="4117242" y="138023"/>
+          <a:ext cx="5803900" cy="5562144"/>
         </p:xfrm>
         <a:graphic>
           <a:graphicData uri="http://schemas.openxmlformats.org/drawingml/2006/table">
@@ -16164,6 +16194,29 @@
                         <a:rPr lang="ko-KR" altLang="en-US" sz="1100" dirty="0"/>
                         <a:t>등을 포함한 모든 컨텐츠</a:t>
                       </a:r>
+                      <a:endParaRPr lang="en-US" altLang="ko-KR" sz="1100" dirty="0"/>
+                    </a:p>
+                    <a:p>
+                      <a:pPr marL="285750" indent="-285750" latinLnBrk="1">
+                        <a:buFontTx/>
+                        <a:buChar char="-"/>
+                      </a:pPr>
+                      <a:r>
+                        <a:rPr lang="en-US" altLang="ko-KR" sz="1100" dirty="0">
+                          <a:highlight>
+                            <a:srgbClr val="FFFF00"/>
+                          </a:highlight>
+                        </a:rPr>
+                        <a:t>DB</a:t>
+                      </a:r>
+                      <a:r>
+                        <a:rPr lang="ko-KR" altLang="en-US" sz="1100" dirty="0">
+                          <a:highlight>
+                            <a:srgbClr val="FFFF00"/>
+                          </a:highlight>
+                        </a:rPr>
+                        <a:t>를 사용한 사용자 정보 관리</a:t>
+                      </a:r>
                     </a:p>
                   </a:txBody>
                   <a:tcPr>
@@ -17653,7 +17706,7 @@
         <p:spPr>
           <a:xfrm>
             <a:off x="118237" y="1528972"/>
-            <a:ext cx="9648825" cy="1477328"/>
+            <a:ext cx="9648825" cy="1200329"/>
           </a:xfrm>
           <a:prstGeom prst="rect">
             <a:avLst/>
@@ -17682,7 +17735,7 @@
           <a:p>
             <a:r>
               <a:rPr lang="ko-KR" altLang="en-US" dirty="0"/>
-              <a:t>스레드 마다 특정 공간에 대한 자료구조를 각각 가지고 있게 하고</a:t>
+              <a:t>모든 스레드가 전체 공간에 대한 자료구조를 복사해 가지고 있게 하고</a:t>
             </a:r>
             <a:r>
               <a:rPr lang="en-US" altLang="ko-KR" dirty="0"/>
@@ -17690,7 +17743,7 @@
             </a:r>
             <a:r>
               <a:rPr lang="ko-KR" altLang="en-US" dirty="0"/>
-              <a:t> 해당 공간에 이벤트 발생 시  큐를 이용하여 해당 사실을 모든 스레드에게 알리고 각자 자신의 자료구조에 해당 사실을 업데이트 하게 함</a:t>
+              <a:t> 특정 공간에 이벤트 발생 시  큐를 이용하여 해당 사실을 모든 스레드에게 알리고 각자 자신의 복사된 자료구조에 해당 사실을 업데이트 하게 함</a:t>
             </a:r>
             <a:r>
               <a:rPr lang="en-US" altLang="ko-KR" dirty="0"/>
@@ -17698,7 +17751,7 @@
             </a:r>
             <a:r>
               <a:rPr lang="ko-KR" altLang="en-US" dirty="0"/>
-              <a:t>특정 공간에 대한 자료구조는 각각 가지고 있지만 컨테이너의 상황은 모든 스레드가 같게 유지</a:t>
+              <a:t>모든 복사된 자료구조는 같은 값을 유지</a:t>
             </a:r>
             <a:r>
               <a:rPr lang="en-US" altLang="ko-KR" dirty="0"/>
@@ -17752,7 +17805,7 @@
           <a:p>
             <a:r>
               <a:rPr lang="ko-KR" altLang="en-US" dirty="0"/>
-              <a:t>이렇게 함으로써 특정 공간에 대한 검색 및 순회에 해당 스레드 소유의 자료구조만을 접근하면 되기 때문에 </a:t>
+              <a:t>이렇게 함으로써 특정 공간에 대한 검색 및 순회 시 해당 스레드 소유의 자료구조만을 접근하면 되기 때문에 </a:t>
             </a:r>
             <a:r>
               <a:rPr lang="en-US" altLang="ko-KR" dirty="0"/>
@@ -17760,19 +17813,19 @@
             </a:r>
             <a:r>
               <a:rPr lang="ko-KR" altLang="en-US" dirty="0"/>
-              <a:t>을 완전히 제거해버릴 수 있고</a:t>
-            </a:r>
-            <a:r>
-              <a:rPr lang="en-US" altLang="ko-KR" dirty="0"/>
-              <a:t>, </a:t>
+              <a:t>을 완전히 제거해버릴 수 있다</a:t>
+            </a:r>
+            <a:r>
+              <a:rPr lang="en-US" altLang="ko-KR" dirty="0"/>
+              <a:t>. </a:t>
             </a:r>
             <a:r>
               <a:rPr lang="ko-KR" altLang="en-US" dirty="0"/>
-              <a:t>따라서 </a:t>
-            </a:r>
-            <a:r>
-              <a:rPr lang="en-US" altLang="ko-KR" dirty="0"/>
-              <a:t>Move,</a:t>
+              <a:t>따라서</a:t>
+            </a:r>
+            <a:r>
+              <a:rPr lang="en-US" altLang="ko-KR" dirty="0"/>
+              <a:t>,</a:t>
             </a:r>
             <a:r>
               <a:rPr lang="ko-KR" altLang="en-US" dirty="0"/>
@@ -17780,11 +17833,19 @@
             </a:r>
             <a:r>
               <a:rPr lang="en-US" altLang="ko-KR" dirty="0"/>
+              <a:t>Move,</a:t>
+            </a:r>
+            <a:r>
+              <a:rPr lang="ko-KR" altLang="en-US" dirty="0"/>
+              <a:t> </a:t>
+            </a:r>
+            <a:r>
+              <a:rPr lang="en-US" altLang="ko-KR" dirty="0"/>
               <a:t>Attack</a:t>
             </a:r>
             <a:r>
               <a:rPr lang="ko-KR" altLang="en-US" dirty="0"/>
-              <a:t> 패킷 등을 포함한 다양한 패킷을 주변에 </a:t>
+              <a:t> 패킷 등을 포함한 다양한 패킷을 주변 플레이어에게 </a:t>
             </a:r>
             <a:r>
               <a:rPr lang="en-US" altLang="ko-KR" dirty="0"/>
@@ -17792,7 +17853,15 @@
             </a:r>
             <a:r>
               <a:rPr lang="ko-KR" altLang="en-US" dirty="0"/>
-              <a:t>할 때의 순회 오버헤드가 크게 감소 또한 </a:t>
+              <a:t>할 때의 순회 오버헤드가 크게 감소하며</a:t>
+            </a:r>
+            <a:r>
+              <a:rPr lang="en-US" altLang="ko-KR" dirty="0"/>
+              <a:t>,</a:t>
+            </a:r>
+            <a:r>
+              <a:rPr lang="ko-KR" altLang="en-US" dirty="0"/>
+              <a:t> </a:t>
             </a:r>
             <a:r>
               <a:rPr lang="ko-KR" altLang="en-US" dirty="0" err="1"/>
@@ -17816,23 +17885,23 @@
             </a:r>
             <a:r>
               <a:rPr lang="ko-KR" altLang="en-US" dirty="0"/>
-              <a:t> 로직처럼 작성이 가능해짐</a:t>
-            </a:r>
-            <a:r>
-              <a:rPr lang="en-US" altLang="ko-KR" dirty="0"/>
-              <a:t> </a:t>
+              <a:t> 로직처럼 작성이 가능하다</a:t>
+            </a:r>
+            <a:r>
+              <a:rPr lang="en-US" altLang="ko-KR" dirty="0"/>
+              <a:t>. </a:t>
             </a:r>
             <a:r>
               <a:rPr lang="ko-KR" altLang="en-US" dirty="0"/>
-              <a:t>그리고 </a:t>
-            </a:r>
-            <a:r>
-              <a:rPr lang="en-US" altLang="ko-KR" dirty="0"/>
-              <a:t>ID N</a:t>
+              <a:t>그리고</a:t>
+            </a:r>
+            <a:r>
+              <a:rPr lang="en-US" altLang="ko-KR" dirty="0"/>
+              <a:t>,</a:t>
             </a:r>
             <a:r>
               <a:rPr lang="ko-KR" altLang="en-US" dirty="0"/>
-              <a:t>번 오브젝트를 찾아서 파티신청 </a:t>
+              <a:t> 파티신청 </a:t>
             </a:r>
             <a:r>
               <a:rPr lang="en-US" altLang="ko-KR" dirty="0"/>
@@ -17848,7 +17917,15 @@
             </a:r>
             <a:r>
               <a:rPr lang="ko-KR" altLang="en-US" dirty="0"/>
-              <a:t>공격 등 검색이 필요할 때에도 당연히 </a:t>
+              <a:t>공격 등 </a:t>
+            </a:r>
+            <a:r>
+              <a:rPr lang="en-US" altLang="ko-KR" dirty="0"/>
+              <a:t>Object ID</a:t>
+            </a:r>
+            <a:r>
+              <a:rPr lang="ko-KR" altLang="en-US" dirty="0"/>
+              <a:t>를 통한 검색이 필요할 때에도 당연히 </a:t>
             </a:r>
             <a:r>
               <a:rPr lang="en-US" altLang="ko-KR" dirty="0"/>
@@ -17978,6 +18055,22 @@
               <a:buFontTx/>
               <a:buChar char="-"/>
             </a:pPr>
+            <a:r>
+              <a:rPr lang="ko-KR" altLang="en-US" sz="1400" b="1" dirty="0"/>
+              <a:t> </a:t>
+            </a:r>
+            <a:r>
+              <a:rPr lang="ko-KR" altLang="en-US" sz="1400" b="1" dirty="0" err="1"/>
+              <a:t>적용전</a:t>
+            </a:r>
+            <a:r>
+              <a:rPr lang="ko-KR" altLang="en-US" sz="1400" b="1" dirty="0"/>
+              <a:t> </a:t>
+            </a:r>
+            <a:r>
+              <a:rPr lang="en-US" altLang="ko-KR" sz="1400" dirty="0"/>
+              <a:t>: </a:t>
+            </a:r>
             <a:r>
               <a:rPr lang="ko-KR" altLang="en-US" sz="1400" dirty="0"/>
               <a:t>가장 많이 하는 작업 인데도 불구하고 매우 비효율적으로 했어야 함 </a:t>

--- a/포트폴리오/서버_최재혁/포트폴리오.pptx
+++ b/포트폴리오/서버_최재혁/포트폴리오.pptx
@@ -4621,8 +4621,8 @@
         </p:nvSpPr>
         <p:spPr>
           <a:xfrm>
-            <a:off x="305723" y="1468581"/>
-            <a:ext cx="9072562" cy="1125436"/>
+            <a:off x="305723" y="1532701"/>
+            <a:ext cx="9072562" cy="997196"/>
           </a:xfrm>
           <a:prstGeom prst="rect">
             <a:avLst/>
@@ -4673,9 +4673,12 @@
             </a:r>
             <a:r>
               <a:rPr lang="ko-KR" altLang="en-US" sz="1800" dirty="0"/>
-              <a:t>을 필요로 하는 업데이트 발생 시 해당 객체의 이벤트 큐에  그 사실만을 전달하고 그 객체가 이벤트 큐에서 이벤트를 하나씩 꺼내어 스스로 하나씩 업데이트 하게 함</a:t>
-            </a:r>
-            <a:endParaRPr lang="en-US" altLang="ko-KR" sz="1800" dirty="0"/>
+              <a:t>을 필요로 하는 업데이트 발생 시 해당 객체의 이벤트 큐에  그 사실만을 전달하고 그 객체가 이벤트 큐에서 이벤트를 하나씩 꺼내어 스스로 하나씩 업데이트 하게 한다</a:t>
+            </a:r>
+            <a:r>
+              <a:rPr lang="en-US" altLang="ko-KR" sz="1800" dirty="0"/>
+              <a:t>.</a:t>
+            </a:r>
           </a:p>
         </p:txBody>
       </p:sp>
@@ -4799,9 +4802,12 @@
             </a:r>
             <a:r>
               <a:rPr lang="ko-KR" altLang="en-US" dirty="0"/>
-              <a:t>수정 작업을 하려는 다른 모든 스레드들은 전부 기다릴 수 밖에 없고 유저와 몬스터가 많아질 수록 해당 상황은 더 심각해짐</a:t>
-            </a:r>
-            <a:endParaRPr lang="en-US" altLang="ko-KR" dirty="0"/>
+              <a:t>수정 작업을 하려는 다른 모든 스레드들은 전부 기다릴 수 밖에 없고 유저와 몬스터가 많아질 수록 해당 상황은 더 심각해 진다</a:t>
+            </a:r>
+            <a:r>
+              <a:rPr lang="en-US" altLang="ko-KR" dirty="0"/>
+              <a:t>.</a:t>
+            </a:r>
           </a:p>
           <a:p>
             <a:r>
@@ -4814,9 +4820,12 @@
             </a:r>
             <a:r>
               <a:rPr lang="ko-KR" altLang="en-US" dirty="0"/>
-              <a:t>을 사용하지 않고 업데이트를 가능하게 함</a:t>
-            </a:r>
-            <a:endParaRPr lang="en-US" altLang="ko-KR" dirty="0"/>
+              <a:t>을 사용하지 않고 업데이트를 가능하게 한다</a:t>
+            </a:r>
+            <a:r>
+              <a:rPr lang="en-US" altLang="ko-KR" dirty="0"/>
+              <a:t>.</a:t>
+            </a:r>
           </a:p>
           <a:p>
             <a:r>
@@ -4996,7 +5005,7 @@
             </a:r>
             <a:r>
               <a:rPr lang="en-US" altLang="ko-KR" sz="1400" dirty="0"/>
-              <a:t> </a:t>
+              <a:t>)</a:t>
             </a:r>
             <a:endParaRPr lang="ko-KR" altLang="en-US" sz="1400" dirty="0"/>
           </a:p>
@@ -6322,20 +6331,12 @@
               <a:buChar char="-"/>
             </a:pPr>
             <a:r>
-              <a:rPr lang="ko-KR" altLang="en-US" sz="1400" dirty="0" err="1"/>
-              <a:t>락</a:t>
+              <a:rPr lang="en-US" altLang="ko-KR" sz="1400" dirty="0"/>
+              <a:t>Lock-Free</a:t>
             </a:r>
             <a:r>
               <a:rPr lang="ko-KR" altLang="en-US" sz="1400" dirty="0"/>
-              <a:t> </a:t>
-            </a:r>
-            <a:r>
-              <a:rPr lang="ko-KR" altLang="en-US" sz="1400" dirty="0" err="1"/>
-              <a:t>프리큐는</a:t>
-            </a:r>
-            <a:r>
-              <a:rPr lang="ko-KR" altLang="en-US" sz="1400" dirty="0"/>
-              <a:t> 여러 곳에서 제작한 자료구조가 이미 존재</a:t>
+              <a:t> 큐는 여러 곳에서 제작한 자료구조가 이미 존재</a:t>
             </a:r>
             <a:endParaRPr lang="en-US" altLang="ko-KR" sz="1400" dirty="0"/>
           </a:p>
@@ -6362,9 +6363,12 @@
             </a:r>
             <a:r>
               <a:rPr lang="ko-KR" altLang="en-US" sz="1400" dirty="0"/>
-              <a:t>하고 일을 실행하는 건 스레드 하나로 보장됨</a:t>
-            </a:r>
-            <a:endParaRPr lang="en-US" altLang="ko-KR" sz="1400" dirty="0"/>
+              <a:t>하고 일을 실행하는 건 스레드 하나로 보장된다</a:t>
+            </a:r>
+            <a:r>
+              <a:rPr lang="en-US" altLang="ko-KR" sz="1400" dirty="0"/>
+              <a:t>.</a:t>
+            </a:r>
           </a:p>
           <a:p>
             <a:pPr marL="285750" indent="-285750">
@@ -6385,15 +6389,7 @@
             </a:r>
             <a:r>
               <a:rPr lang="ko-KR" altLang="en-US" sz="1400" dirty="0"/>
-              <a:t>문제를 </a:t>
-            </a:r>
-            <a:r>
-              <a:rPr lang="ko-KR" altLang="en-US" sz="1400" dirty="0" err="1"/>
-              <a:t>신경쓰지</a:t>
-            </a:r>
-            <a:r>
-              <a:rPr lang="ko-KR" altLang="en-US" sz="1400" dirty="0"/>
-              <a:t> 않아도 된다</a:t>
+              <a:t>문제를 신경 쓰지 않아도 된다</a:t>
             </a:r>
             <a:r>
               <a:rPr lang="en-US" altLang="ko-KR" sz="1400" dirty="0"/>
@@ -6461,13 +6457,16 @@
             </a:r>
             <a:r>
               <a:rPr lang="en-US" altLang="ko-KR" sz="1400" dirty="0"/>
-              <a:t>Lock Free</a:t>
+              <a:t>Lock-Free</a:t>
             </a:r>
             <a:r>
               <a:rPr lang="ko-KR" altLang="en-US" sz="1400" dirty="0"/>
-              <a:t>큐는 찾아서 나오지 않았음</a:t>
-            </a:r>
-            <a:endParaRPr lang="en-US" altLang="ko-KR" sz="1400" dirty="0"/>
+              <a:t>큐는 찾아서 나오지 않았다</a:t>
+            </a:r>
+            <a:r>
+              <a:rPr lang="en-US" altLang="ko-KR" sz="1400" dirty="0"/>
+              <a:t>.</a:t>
+            </a:r>
           </a:p>
           <a:p>
             <a:r>
@@ -9224,6 +9223,50 @@
           </a:p>
         </p:txBody>
       </p:sp>
+      <p:sp>
+        <p:nvSpPr>
+          <p:cNvPr id="4" name="TextBox 3">
+            <a:extLst>
+              <a:ext uri="{FF2B5EF4-FFF2-40B4-BE49-F238E27FC236}">
+                <a16:creationId xmlns:a16="http://schemas.microsoft.com/office/drawing/2014/main" id="{4FBEA9E6-602C-E029-AFFF-F89A0F9C7DC8}"/>
+              </a:ext>
+            </a:extLst>
+          </p:cNvPr>
+          <p:cNvSpPr txBox="1"/>
+          <p:nvPr/>
+        </p:nvSpPr>
+        <p:spPr>
+          <a:xfrm>
+            <a:off x="6300787" y="3206413"/>
+            <a:ext cx="3667125" cy="646331"/>
+          </a:xfrm>
+          <a:prstGeom prst="rect">
+            <a:avLst/>
+          </a:prstGeom>
+          <a:noFill/>
+        </p:spPr>
+        <p:txBody>
+          <a:bodyPr wrap="square" rtlCol="0">
+            <a:spAutoFit/>
+          </a:bodyPr>
+          <a:lstStyle/>
+          <a:p>
+            <a:r>
+              <a:rPr lang="en-US" altLang="ko-KR" dirty="0" err="1"/>
+              <a:t>dynamic_cast</a:t>
+            </a:r>
+            <a:r>
+              <a:rPr lang="ko-KR" altLang="en-US" dirty="0"/>
+              <a:t>를 이용했다면 이렇게 컴포넌트 검색을 했어야 한다</a:t>
+            </a:r>
+            <a:r>
+              <a:rPr lang="en-US" altLang="ko-KR" dirty="0"/>
+              <a:t>.</a:t>
+            </a:r>
+            <a:endParaRPr lang="ko-KR" altLang="en-US" dirty="0"/>
+          </a:p>
+        </p:txBody>
+      </p:sp>
     </p:spTree>
     <p:extLst>
       <p:ext uri="{BB962C8B-B14F-4D97-AF65-F5344CB8AC3E}">
@@ -9272,7 +9315,7 @@
         </p:nvSpPr>
         <p:spPr>
           <a:xfrm>
-            <a:off x="504000" y="394601"/>
+            <a:off x="504000" y="203087"/>
             <a:ext cx="9071640" cy="609398"/>
           </a:xfrm>
         </p:spPr>
@@ -9334,17 +9377,20 @@
         </p:nvSpPr>
         <p:spPr>
           <a:xfrm>
-            <a:off x="346837" y="1121813"/>
-            <a:ext cx="9071640" cy="1145138"/>
+            <a:off x="332549" y="895711"/>
+            <a:ext cx="9071640" cy="1585551"/>
           </a:xfrm>
         </p:spPr>
         <p:txBody>
           <a:bodyPr>
-            <a:normAutofit/>
+            <a:normAutofit fontScale="77500" lnSpcReduction="20000"/>
           </a:bodyPr>
           <a:lstStyle/>
           <a:p>
             <a:pPr marL="0" indent="0">
+              <a:lnSpc>
+                <a:spcPct val="170000"/>
+              </a:lnSpc>
               <a:buNone/>
             </a:pPr>
             <a:r>
@@ -9374,6 +9420,9 @@
           </a:p>
           <a:p>
             <a:pPr marL="0" indent="0">
+              <a:lnSpc>
+                <a:spcPct val="170000"/>
+              </a:lnSpc>
               <a:buNone/>
             </a:pPr>
             <a:r>
@@ -9435,6 +9484,9 @@
           </a:p>
           <a:p>
             <a:pPr marL="0" indent="0">
+              <a:lnSpc>
+                <a:spcPct val="170000"/>
+              </a:lnSpc>
               <a:buNone/>
             </a:pPr>
             <a:r>
@@ -9448,6 +9500,114 @@
             <a:r>
               <a:rPr lang="ko-KR" altLang="en-US" sz="1300" dirty="0"/>
               <a:t>개를 넘을 것 같지 않았는데 저런 적은 수의 원소를 가진 컨테이너를 검색할 때는 그냥 배열에서 선형탐색을 해도 다른 방법과 별 차이가 없을 것 같다고 생각했기 때문이다</a:t>
+            </a:r>
+            <a:r>
+              <a:rPr lang="en-US" altLang="ko-KR" sz="1300" dirty="0"/>
+              <a:t>. </a:t>
+            </a:r>
+          </a:p>
+          <a:p>
+            <a:pPr marL="0" indent="0">
+              <a:lnSpc>
+                <a:spcPct val="170000"/>
+              </a:lnSpc>
+              <a:buNone/>
+            </a:pPr>
+            <a:r>
+              <a:rPr lang="ko-KR" altLang="en-US" sz="1300" dirty="0"/>
+              <a:t>또한</a:t>
+            </a:r>
+            <a:r>
+              <a:rPr lang="en-US" altLang="ko-KR" sz="1300" dirty="0"/>
+              <a:t> </a:t>
+            </a:r>
+            <a:r>
+              <a:rPr lang="ko-KR" altLang="en-US" sz="1300" dirty="0"/>
+              <a:t>비주얼 스튜디오 기준</a:t>
+            </a:r>
+            <a:r>
+              <a:rPr lang="en-US" altLang="ko-KR" sz="1300" dirty="0"/>
+              <a:t> std::</a:t>
+            </a:r>
+            <a:r>
+              <a:rPr lang="en-US" altLang="ko-KR" sz="1300" dirty="0" err="1"/>
+              <a:t>unordered_map</a:t>
+            </a:r>
+            <a:r>
+              <a:rPr lang="ko-KR" altLang="en-US" sz="1300" dirty="0"/>
+              <a:t>은 </a:t>
+            </a:r>
+            <a:r>
+              <a:rPr lang="en-US" altLang="ko-KR" sz="1300" dirty="0"/>
+              <a:t>64</a:t>
+            </a:r>
+            <a:r>
+              <a:rPr lang="ko-KR" altLang="en-US" sz="1300" dirty="0"/>
+              <a:t>바이트</a:t>
+            </a:r>
+            <a:r>
+              <a:rPr lang="en-US" altLang="ko-KR" sz="1300" dirty="0"/>
+              <a:t>, std::vector</a:t>
+            </a:r>
+            <a:r>
+              <a:rPr lang="ko-KR" altLang="en-US" sz="1300" dirty="0"/>
+              <a:t>는 </a:t>
+            </a:r>
+            <a:r>
+              <a:rPr lang="en-US" altLang="ko-KR" sz="1300" dirty="0"/>
+              <a:t>24</a:t>
+            </a:r>
+            <a:r>
+              <a:rPr lang="ko-KR" altLang="en-US" sz="1300" dirty="0"/>
+              <a:t>바이트이기 때문에 </a:t>
+            </a:r>
+            <a:r>
+              <a:rPr lang="en-US" altLang="ko-KR" sz="1300" dirty="0"/>
+              <a:t>std::vector</a:t>
+            </a:r>
+            <a:r>
+              <a:rPr lang="ko-KR" altLang="en-US" sz="1300" dirty="0"/>
+              <a:t>가 더 적은 용량을 차지하고 </a:t>
+            </a:r>
+            <a:r>
+              <a:rPr lang="en-US" altLang="ko-KR" sz="1300" dirty="0"/>
+              <a:t>std::map</a:t>
+            </a:r>
+            <a:r>
+              <a:rPr lang="ko-KR" altLang="en-US" sz="1300" dirty="0"/>
+              <a:t>은 </a:t>
+            </a:r>
+            <a:r>
+              <a:rPr lang="en-US" altLang="ko-KR" sz="1300" dirty="0"/>
+              <a:t>16</a:t>
+            </a:r>
+            <a:r>
+              <a:rPr lang="ko-KR" altLang="en-US" sz="1300" dirty="0"/>
+              <a:t>바이트이지만 </a:t>
+            </a:r>
+            <a:r>
+              <a:rPr lang="en-US" altLang="ko-KR" sz="1300" dirty="0"/>
+              <a:t>vector</a:t>
+            </a:r>
+            <a:r>
+              <a:rPr lang="ko-KR" altLang="en-US" sz="1300" dirty="0"/>
+              <a:t>는 메모리에서 연속적인 자료구조이기 때문에 더 좋은 캐시히트를</a:t>
+            </a:r>
+            <a:r>
+              <a:rPr lang="en-US" altLang="ko-KR" sz="1300" dirty="0"/>
+              <a:t> </a:t>
+            </a:r>
+            <a:r>
+              <a:rPr lang="ko-KR" altLang="en-US" sz="1300" dirty="0"/>
+              <a:t>기대할 수 있어서 </a:t>
+            </a:r>
+            <a:r>
+              <a:rPr lang="en-US" altLang="ko-KR" sz="1300" dirty="0"/>
+              <a:t>std::vector</a:t>
+            </a:r>
+            <a:r>
+              <a:rPr lang="ko-KR" altLang="en-US" sz="1300" dirty="0"/>
+              <a:t>를 사용하기로 결정하였다</a:t>
             </a:r>
             <a:r>
               <a:rPr lang="en-US" altLang="ko-KR" sz="1300" dirty="0"/>
@@ -17743,7 +17903,7 @@
             </a:r>
             <a:r>
               <a:rPr lang="ko-KR" altLang="en-US" dirty="0"/>
-              <a:t> 특정 공간에 이벤트 발생 시  큐를 이용하여 해당 사실을 모든 스레드에게 알리고 각자 자신의 복사된 자료구조에 해당 사실을 업데이트 하게 함</a:t>
+              <a:t> 특정 공간에 이벤트 발생 시  큐를 이용하여 해당 사실을 모든 스레드에게 알리고 각자 자신의 복사된 자료구조에 해당 사실을 업데이트 하게 한다</a:t>
             </a:r>
             <a:r>
               <a:rPr lang="en-US" altLang="ko-KR" dirty="0"/>
@@ -18047,7 +18207,7 @@
         </p:spPr>
         <p:txBody>
           <a:bodyPr>
-            <a:normAutofit/>
+            <a:normAutofit fontScale="92500"/>
           </a:bodyPr>
           <a:lstStyle/>
           <a:p>
@@ -18057,15 +18217,7 @@
             </a:pPr>
             <a:r>
               <a:rPr lang="ko-KR" altLang="en-US" sz="1400" b="1" dirty="0"/>
-              <a:t> </a:t>
-            </a:r>
-            <a:r>
-              <a:rPr lang="ko-KR" altLang="en-US" sz="1400" b="1" dirty="0" err="1"/>
-              <a:t>적용전</a:t>
-            </a:r>
-            <a:r>
-              <a:rPr lang="ko-KR" altLang="en-US" sz="1400" b="1" dirty="0"/>
-              <a:t> </a:t>
+              <a:t> 적용 전 </a:t>
             </a:r>
             <a:r>
               <a:rPr lang="en-US" altLang="ko-KR" sz="1400" dirty="0"/>
@@ -18073,7 +18225,15 @@
             </a:r>
             <a:r>
               <a:rPr lang="ko-KR" altLang="en-US" sz="1400" dirty="0"/>
-              <a:t>가장 많이 하는 작업 인데도 불구하고 매우 비효율적으로 했어야 함 </a:t>
+              <a:t>가장 많이 하는 작업 인데도 불구하고 매우 비효율적으로 했어야 한다</a:t>
+            </a:r>
+            <a:r>
+              <a:rPr lang="en-US" altLang="ko-KR" sz="1400" dirty="0"/>
+              <a:t>.</a:t>
+            </a:r>
+            <a:r>
+              <a:rPr lang="ko-KR" altLang="en-US" sz="1400" dirty="0"/>
+              <a:t> </a:t>
             </a:r>
             <a:r>
               <a:rPr lang="en-US" altLang="ko-KR" sz="1400" dirty="0"/>
@@ -18202,7 +18362,15 @@
           <a:p>
             <a:r>
               <a:rPr lang="ko-KR" altLang="en-US" dirty="0"/>
-              <a:t>만약 검색해야 할 컨테이너가 선형탐색이 필요한 경우라면 더 큰 개선을 기대할 수 있음 </a:t>
+              <a:t>만약 검색해야 할 컨테이너가 선형탐색이 필요한 경우라면 더 큰 개선을 기대할 수 있다</a:t>
+            </a:r>
+            <a:r>
+              <a:rPr lang="en-US" altLang="ko-KR" dirty="0"/>
+              <a:t>.</a:t>
+            </a:r>
+            <a:r>
+              <a:rPr lang="ko-KR" altLang="en-US" dirty="0"/>
+              <a:t> </a:t>
             </a:r>
           </a:p>
         </p:txBody>
